--- a/Documentation/Slides/Weekly-Report-06-29-2026.pptx
+++ b/Documentation/Slides/Weekly-Report-06-29-2026.pptx
@@ -5,56 +5,58 @@
     <p:sldMasterId id="2147483648" r:id="rId4"/>
   </p:sldMasterIdLst>
   <p:notesMasterIdLst>
-    <p:notesMasterId r:id="rId16"/>
+    <p:notesMasterId r:id="rId18"/>
   </p:notesMasterIdLst>
   <p:sldIdLst>
     <p:sldId id="267" r:id="rId5"/>
     <p:sldId id="279" r:id="rId6"/>
     <p:sldId id="294" r:id="rId7"/>
     <p:sldId id="301" r:id="rId8"/>
-    <p:sldId id="302" r:id="rId9"/>
-    <p:sldId id="298" r:id="rId10"/>
-    <p:sldId id="299" r:id="rId11"/>
-    <p:sldId id="300" r:id="rId12"/>
-    <p:sldId id="303" r:id="rId13"/>
-    <p:sldId id="297" r:id="rId14"/>
-    <p:sldId id="277" r:id="rId15"/>
+    <p:sldId id="304" r:id="rId9"/>
+    <p:sldId id="305" r:id="rId10"/>
+    <p:sldId id="306" r:id="rId11"/>
+    <p:sldId id="298" r:id="rId12"/>
+    <p:sldId id="299" r:id="rId13"/>
+    <p:sldId id="300" r:id="rId14"/>
+    <p:sldId id="303" r:id="rId15"/>
+    <p:sldId id="297" r:id="rId16"/>
+    <p:sldId id="277" r:id="rId17"/>
   </p:sldIdLst>
   <p:sldSz cx="9144000" cy="6858000" type="screen4x3"/>
   <p:notesSz cx="6858000" cy="9144000"/>
   <p:embeddedFontLst>
     <p:embeddedFont>
       <p:font typeface="Acumin Pro" panose="020B0504020202020204" pitchFamily="34" charset="0"/>
-      <p:regular r:id="rId17"/>
-      <p:bold r:id="rId18"/>
-      <p:italic r:id="rId19"/>
-      <p:boldItalic r:id="rId20"/>
+      <p:regular r:id="rId19"/>
+      <p:bold r:id="rId20"/>
+      <p:italic r:id="rId21"/>
+      <p:boldItalic r:id="rId22"/>
     </p:embeddedFont>
     <p:embeddedFont>
       <p:font typeface="Acumin Pro Condensed Semibold" panose="020B0604020202020204" charset="0"/>
-      <p:regular r:id="rId21"/>
-      <p:bold r:id="rId22"/>
-      <p:italic r:id="rId23"/>
-      <p:boldItalic r:id="rId24"/>
+      <p:regular r:id="rId23"/>
+      <p:bold r:id="rId24"/>
+      <p:italic r:id="rId25"/>
+      <p:boldItalic r:id="rId26"/>
     </p:embeddedFont>
     <p:embeddedFont>
       <p:font typeface="Acumin Pro Medium" panose="020B0604020202020204" charset="0"/>
-      <p:regular r:id="rId25"/>
-      <p:italic r:id="rId26"/>
-    </p:embeddedFont>
-    <p:embeddedFont>
-      <p:font typeface="Franklin Gothic Book" panose="020B0503020102020204" pitchFamily="34" charset="0"/>
       <p:regular r:id="rId27"/>
       <p:italic r:id="rId28"/>
     </p:embeddedFont>
     <p:embeddedFont>
-      <p:font typeface="Franklin Gothic Medium" panose="020B0603020102020204" pitchFamily="34" charset="0"/>
+      <p:font typeface="Franklin Gothic Book" panose="020B0503020102020204" pitchFamily="34" charset="0"/>
       <p:regular r:id="rId29"/>
       <p:italic r:id="rId30"/>
     </p:embeddedFont>
     <p:embeddedFont>
+      <p:font typeface="Franklin Gothic Medium" panose="020B0603020102020204" pitchFamily="34" charset="0"/>
+      <p:regular r:id="rId31"/>
+      <p:italic r:id="rId32"/>
+    </p:embeddedFont>
+    <p:embeddedFont>
       <p:font typeface="Franklin Gothic Medium Cond" panose="020B0606030402020204" pitchFamily="34" charset="0"/>
-      <p:regular r:id="rId31"/>
+      <p:regular r:id="rId33"/>
     </p:embeddedFont>
   </p:embeddedFontLst>
   <p:defaultTextStyle>
@@ -13718,7 +13720,7 @@
           <p:cNvPr id="2" name="Text Placeholder 1">
             <a:extLst>
               <a:ext uri="{FF2B5EF4-FFF2-40B4-BE49-F238E27FC236}">
-                <a16:creationId xmlns:a16="http://schemas.microsoft.com/office/drawing/2014/main" id="{BA906C6D-FC50-8590-63C1-71685CCA6442}"/>
+                <a16:creationId xmlns:a16="http://schemas.microsoft.com/office/drawing/2014/main" id="{8C8FF36B-651C-9572-A167-1F25B76D5758}"/>
               </a:ext>
             </a:extLst>
           </p:cNvPr>
@@ -13736,8 +13738,11 @@
           <a:p>
             <a:r>
               <a:rPr lang="en-US" dirty="0"/>
-              <a:t>Goals for next week</a:t>
-            </a:r>
+              <a:t>Purchased Solution</a:t>
+            </a:r>
+          </a:p>
+          <a:p>
+            <a:endParaRPr lang="en-US" dirty="0"/>
           </a:p>
         </p:txBody>
       </p:sp>
@@ -13746,7 +13751,7 @@
           <p:cNvPr id="3" name="Text Placeholder 2">
             <a:extLst>
               <a:ext uri="{FF2B5EF4-FFF2-40B4-BE49-F238E27FC236}">
-                <a16:creationId xmlns:a16="http://schemas.microsoft.com/office/drawing/2014/main" id="{BFEA2F54-1ABF-E520-B82B-EAB7AFF8CCE8}"/>
+                <a16:creationId xmlns:a16="http://schemas.microsoft.com/office/drawing/2014/main" id="{745A5B72-4829-689E-B04D-5C58E8EDF223}"/>
               </a:ext>
             </a:extLst>
           </p:cNvPr>
@@ -13768,7 +13773,7 @@
             </a:pPr>
             <a:r>
               <a:rPr lang="en-US" dirty="0"/>
-              <a:t>Finish System characterization and diagram for Pedro </a:t>
+              <a:t>What I think is the best solution is to use an alternative cable with no adverse effects</a:t>
             </a:r>
           </a:p>
           <a:p>
@@ -13778,7 +13783,567 @@
             </a:pPr>
             <a:r>
               <a:rPr lang="en-US" dirty="0"/>
+              <a:t>The GPIO header on most boards uses the same connector, so we can take advantage of that</a:t>
+            </a:r>
+          </a:p>
+          <a:p>
+            <a:pPr marL="285750" indent="-285750">
+              <a:buFont typeface="Arial" panose="020B0604020202020204" pitchFamily="34" charset="0"/>
+              <a:buChar char="•"/>
+            </a:pPr>
+            <a:r>
+              <a:rPr lang="en-US" dirty="0"/>
+              <a:t>A </a:t>
+            </a:r>
+            <a:r>
+              <a:rPr lang="en-US" dirty="0">
+                <a:hlinkClick r:id="rId2"/>
+              </a:rPr>
+              <a:t>version</a:t>
+            </a:r>
+            <a:r>
+              <a:rPr lang="en-US" dirty="0"/>
+              <a:t> of the DuPont header to </a:t>
+            </a:r>
+            <a:r>
+              <a:rPr lang="en-US" u="sng" dirty="0"/>
+              <a:t>GPIO</a:t>
+            </a:r>
+            <a:r>
+              <a:rPr lang="en-US" dirty="0"/>
+              <a:t> 2 JST Pin Male Header exists, which is exactly what we need</a:t>
+            </a:r>
+          </a:p>
+          <a:p>
+            <a:pPr marL="285750" indent="-285750">
+              <a:buFont typeface="Arial" panose="020B0604020202020204" pitchFamily="34" charset="0"/>
+              <a:buChar char="•"/>
+            </a:pPr>
+            <a:r>
+              <a:rPr lang="en-US" dirty="0"/>
+              <a:t>We might run into signal integrity issues, but there will be no connectivity issues. This version is also short (as the Agriculture department requested)</a:t>
+            </a:r>
+          </a:p>
+        </p:txBody>
+      </p:sp>
+      <p:sp>
+        <p:nvSpPr>
+          <p:cNvPr id="4" name="Title 3">
+            <a:extLst>
+              <a:ext uri="{FF2B5EF4-FFF2-40B4-BE49-F238E27FC236}">
+                <a16:creationId xmlns:a16="http://schemas.microsoft.com/office/drawing/2014/main" id="{8151768E-DCEC-5979-692E-539682445199}"/>
+              </a:ext>
+            </a:extLst>
+          </p:cNvPr>
+          <p:cNvSpPr>
+            <a:spLocks noGrp="1"/>
+          </p:cNvSpPr>
+          <p:nvPr>
+            <p:ph type="title"/>
+          </p:nvPr>
+        </p:nvSpPr>
+        <p:spPr/>
+        <p:txBody>
+          <a:bodyPr/>
+          <a:lstStyle/>
+          <a:p>
+            <a:r>
+              <a:rPr lang="en-US" dirty="0"/>
+              <a:t>Supply Updates</a:t>
+            </a:r>
+          </a:p>
+        </p:txBody>
+      </p:sp>
+      <p:sp>
+        <p:nvSpPr>
+          <p:cNvPr id="5" name="Footer Placeholder 4">
+            <a:extLst>
+              <a:ext uri="{FF2B5EF4-FFF2-40B4-BE49-F238E27FC236}">
+                <a16:creationId xmlns:a16="http://schemas.microsoft.com/office/drawing/2014/main" id="{0B316392-893B-6CBC-709C-76F006A0382C}"/>
+              </a:ext>
+            </a:extLst>
+          </p:cNvPr>
+          <p:cNvSpPr>
+            <a:spLocks noGrp="1"/>
+          </p:cNvSpPr>
+          <p:nvPr>
+            <p:ph type="ftr" sz="quarter" idx="12"/>
+          </p:nvPr>
+        </p:nvSpPr>
+        <p:spPr/>
+        <p:txBody>
+          <a:bodyPr/>
+          <a:lstStyle/>
+          <a:p>
+            <a:pPr algn="r"/>
+            <a:r>
+              <a:rPr lang="en-US"/>
+              <a:t>3/31/23            ‹#›</a:t>
+            </a:r>
+            <a:endParaRPr lang="en-US" dirty="0"/>
+          </a:p>
+        </p:txBody>
+      </p:sp>
+      <p:pic>
+        <p:nvPicPr>
+          <p:cNvPr id="9" name="Picture 8">
+            <a:extLst>
+              <a:ext uri="{FF2B5EF4-FFF2-40B4-BE49-F238E27FC236}">
+                <a16:creationId xmlns:a16="http://schemas.microsoft.com/office/drawing/2014/main" id="{B5A09325-D3E1-A4BC-4155-DE2C94976707}"/>
+              </a:ext>
+            </a:extLst>
+          </p:cNvPr>
+          <p:cNvPicPr>
+            <a:picLocks noChangeAspect="1"/>
+          </p:cNvPicPr>
+          <p:nvPr/>
+        </p:nvPicPr>
+        <p:blipFill>
+          <a:blip r:embed="rId3"/>
+          <a:stretch>
+            <a:fillRect/>
+          </a:stretch>
+        </p:blipFill>
+        <p:spPr>
+          <a:xfrm>
+            <a:off x="985838" y="4306163"/>
+            <a:ext cx="1833759" cy="1597546"/>
+          </a:xfrm>
+          <a:prstGeom prst="rect">
+            <a:avLst/>
+          </a:prstGeom>
+        </p:spPr>
+      </p:pic>
+      <p:pic>
+        <p:nvPicPr>
+          <p:cNvPr id="10" name="Picture 9" descr="2pin Fan to GPIO (Female Dupont) Adapter Cable - Coolerguys">
+            <a:extLst>
+              <a:ext uri="{FF2B5EF4-FFF2-40B4-BE49-F238E27FC236}">
+                <a16:creationId xmlns:a16="http://schemas.microsoft.com/office/drawing/2014/main" id="{FE987CBA-4B66-9626-A48A-7050A83C82E1}"/>
+              </a:ext>
+            </a:extLst>
+          </p:cNvPr>
+          <p:cNvPicPr>
+            <a:picLocks noChangeAspect="1"/>
+          </p:cNvPicPr>
+          <p:nvPr/>
+        </p:nvPicPr>
+        <p:blipFill>
+          <a:blip r:embed="rId4"/>
+          <a:stretch>
+            <a:fillRect/>
+          </a:stretch>
+        </p:blipFill>
+        <p:spPr>
+          <a:xfrm rot="5400000">
+            <a:off x="5293332" y="3600320"/>
+            <a:ext cx="2086348" cy="2986086"/>
+          </a:xfrm>
+          <a:prstGeom prst="rect">
+            <a:avLst/>
+          </a:prstGeom>
+        </p:spPr>
+      </p:pic>
+    </p:spTree>
+    <p:extLst>
+      <p:ext uri="{BB962C8B-B14F-4D97-AF65-F5344CB8AC3E}">
+        <p14:creationId xmlns:p14="http://schemas.microsoft.com/office/powerpoint/2010/main" val="3755923637"/>
+      </p:ext>
+    </p:extLst>
+  </p:cSld>
+  <p:clrMapOvr>
+    <a:masterClrMapping/>
+  </p:clrMapOvr>
+</p:sld>
+</file>
+
+<file path=ppt/slides/slide11.xml><?xml version="1.0" encoding="utf-8"?>
+<p:sld xmlns:a="http://schemas.openxmlformats.org/drawingml/2006/main" xmlns:r="http://schemas.openxmlformats.org/officeDocument/2006/relationships" xmlns:p="http://schemas.openxmlformats.org/presentationml/2006/main">
+  <p:cSld>
+    <p:spTree>
+      <p:nvGrpSpPr>
+        <p:cNvPr id="1" name=""/>
+        <p:cNvGrpSpPr/>
+        <p:nvPr/>
+      </p:nvGrpSpPr>
+      <p:grpSpPr>
+        <a:xfrm>
+          <a:off x="0" y="0"/>
+          <a:ext cx="0" cy="0"/>
+          <a:chOff x="0" y="0"/>
+          <a:chExt cx="0" cy="0"/>
+        </a:xfrm>
+      </p:grpSpPr>
+      <p:sp>
+        <p:nvSpPr>
+          <p:cNvPr id="2" name="Text Placeholder 1">
+            <a:extLst>
+              <a:ext uri="{FF2B5EF4-FFF2-40B4-BE49-F238E27FC236}">
+                <a16:creationId xmlns:a16="http://schemas.microsoft.com/office/drawing/2014/main" id="{99359ED2-157D-0813-AE0C-E643ACEAD268}"/>
+              </a:ext>
+            </a:extLst>
+          </p:cNvPr>
+          <p:cNvSpPr>
+            <a:spLocks noGrp="1"/>
+          </p:cNvSpPr>
+          <p:nvPr>
+            <p:ph type="body" sz="quarter" idx="11"/>
+          </p:nvPr>
+        </p:nvSpPr>
+        <p:spPr/>
+        <p:txBody>
+          <a:bodyPr/>
+          <a:lstStyle/>
+          <a:p>
+            <a:r>
+              <a:rPr lang="en-US" dirty="0"/>
+              <a:t>Pending Request in CIO</a:t>
+            </a:r>
+          </a:p>
+        </p:txBody>
+      </p:sp>
+      <p:sp>
+        <p:nvSpPr>
+          <p:cNvPr id="3" name="Text Placeholder 2">
+            <a:extLst>
+              <a:ext uri="{FF2B5EF4-FFF2-40B4-BE49-F238E27FC236}">
+                <a16:creationId xmlns:a16="http://schemas.microsoft.com/office/drawing/2014/main" id="{617DDD64-E52A-E456-3D86-1C792A73BD1B}"/>
+              </a:ext>
+            </a:extLst>
+          </p:cNvPr>
+          <p:cNvSpPr>
+            <a:spLocks noGrp="1"/>
+          </p:cNvSpPr>
+          <p:nvPr>
+            <p:ph type="body" sz="quarter" idx="10"/>
+          </p:nvPr>
+        </p:nvSpPr>
+        <p:spPr/>
+        <p:txBody>
+          <a:bodyPr/>
+          <a:lstStyle/>
+          <a:p>
+            <a:pPr marL="285750" indent="-285750">
+              <a:buFont typeface="Arial" panose="020B0604020202020204" pitchFamily="34" charset="0"/>
+              <a:buChar char="•"/>
+            </a:pPr>
+            <a:r>
+              <a:rPr lang="en-US" dirty="0"/>
+              <a:t>Purchase Links </a:t>
+            </a:r>
+          </a:p>
+          <a:p>
+            <a:pPr marL="628650" lvl="1" indent="-285750">
+              <a:buFont typeface="Arial" panose="020B0604020202020204" pitchFamily="34" charset="0"/>
+              <a:buChar char="•"/>
+            </a:pPr>
+            <a:r>
+              <a:rPr lang="en-US" dirty="0">
+                <a:hlinkClick r:id="rId2"/>
+              </a:rPr>
+              <a:t>2 Pin Male JST to 2 Separate Female Headers</a:t>
+            </a:r>
+            <a:r>
+              <a:rPr lang="en-US" dirty="0"/>
+              <a:t> (10)</a:t>
+            </a:r>
+          </a:p>
+          <a:p>
+            <a:pPr marL="628650" lvl="1" indent="-285750">
+              <a:buFont typeface="Arial" panose="020B0604020202020204" pitchFamily="34" charset="0"/>
+              <a:buChar char="•"/>
+            </a:pPr>
+            <a:r>
+              <a:rPr lang="en-US" dirty="0"/>
+              <a:t>2-PIN Male JST to 2 Wires (10)</a:t>
+            </a:r>
+          </a:p>
+          <a:p>
+            <a:pPr marL="628650" lvl="1" indent="-285750">
+              <a:buFont typeface="Arial" panose="020B0604020202020204" pitchFamily="34" charset="0"/>
+              <a:buChar char="•"/>
+            </a:pPr>
+            <a:r>
+              <a:rPr lang="en-US" dirty="0"/>
+              <a:t>Female Header to Female Header 5 cm (20)</a:t>
+            </a:r>
+          </a:p>
+          <a:p>
+            <a:pPr marL="628650" lvl="1" indent="-285750">
+              <a:buFont typeface="Arial" panose="020B0604020202020204" pitchFamily="34" charset="0"/>
+              <a:buChar char="•"/>
+            </a:pPr>
+            <a:endParaRPr lang="en-US" dirty="0"/>
+          </a:p>
+          <a:p>
+            <a:pPr marL="285750" indent="-285750">
+              <a:buFont typeface="Arial" panose="020B0604020202020204" pitchFamily="34" charset="0"/>
+              <a:buChar char="•"/>
+            </a:pPr>
+            <a:r>
+              <a:rPr lang="en-US" dirty="0"/>
+              <a:t>Requested through Purdue CIO (2) Requests): Waiting on Approval</a:t>
+            </a:r>
+          </a:p>
+          <a:p>
+            <a:endParaRPr lang="en-US" dirty="0"/>
+          </a:p>
+        </p:txBody>
+      </p:sp>
+      <p:sp>
+        <p:nvSpPr>
+          <p:cNvPr id="4" name="Title 3">
+            <a:extLst>
+              <a:ext uri="{FF2B5EF4-FFF2-40B4-BE49-F238E27FC236}">
+                <a16:creationId xmlns:a16="http://schemas.microsoft.com/office/drawing/2014/main" id="{F368C374-E7ED-31B0-DA2C-FABE8D3D1A8F}"/>
+              </a:ext>
+            </a:extLst>
+          </p:cNvPr>
+          <p:cNvSpPr>
+            <a:spLocks noGrp="1"/>
+          </p:cNvSpPr>
+          <p:nvPr>
+            <p:ph type="title"/>
+          </p:nvPr>
+        </p:nvSpPr>
+        <p:spPr/>
+        <p:txBody>
+          <a:bodyPr/>
+          <a:lstStyle/>
+          <a:p>
+            <a:r>
+              <a:rPr lang="en-US" dirty="0"/>
+              <a:t>Supply Updates</a:t>
+            </a:r>
+          </a:p>
+        </p:txBody>
+      </p:sp>
+      <p:sp>
+        <p:nvSpPr>
+          <p:cNvPr id="5" name="Footer Placeholder 4">
+            <a:extLst>
+              <a:ext uri="{FF2B5EF4-FFF2-40B4-BE49-F238E27FC236}">
+                <a16:creationId xmlns:a16="http://schemas.microsoft.com/office/drawing/2014/main" id="{7056D330-1212-A339-B5BA-A141C302772E}"/>
+              </a:ext>
+            </a:extLst>
+          </p:cNvPr>
+          <p:cNvSpPr>
+            <a:spLocks noGrp="1"/>
+          </p:cNvSpPr>
+          <p:nvPr>
+            <p:ph type="ftr" sz="quarter" idx="12"/>
+          </p:nvPr>
+        </p:nvSpPr>
+        <p:spPr/>
+        <p:txBody>
+          <a:bodyPr/>
+          <a:lstStyle/>
+          <a:p>
+            <a:pPr algn="r"/>
+            <a:r>
+              <a:rPr lang="en-US"/>
+              <a:t>3/31/23            ‹#›</a:t>
+            </a:r>
+            <a:endParaRPr lang="en-US" dirty="0"/>
+          </a:p>
+        </p:txBody>
+      </p:sp>
+      <p:pic>
+        <p:nvPicPr>
+          <p:cNvPr id="7" name="Picture 6">
+            <a:extLst>
+              <a:ext uri="{FF2B5EF4-FFF2-40B4-BE49-F238E27FC236}">
+                <a16:creationId xmlns:a16="http://schemas.microsoft.com/office/drawing/2014/main" id="{2000EF1A-140E-7C1C-DB5F-EB6FFC9CEA3B}"/>
+              </a:ext>
+            </a:extLst>
+          </p:cNvPr>
+          <p:cNvPicPr>
+            <a:picLocks noChangeAspect="1"/>
+          </p:cNvPicPr>
+          <p:nvPr/>
+        </p:nvPicPr>
+        <p:blipFill>
+          <a:blip r:embed="rId3"/>
+          <a:stretch>
+            <a:fillRect/>
+          </a:stretch>
+        </p:blipFill>
+        <p:spPr>
+          <a:xfrm>
+            <a:off x="374688" y="3145987"/>
+            <a:ext cx="2766181" cy="2757722"/>
+          </a:xfrm>
+          <a:prstGeom prst="rect">
+            <a:avLst/>
+          </a:prstGeom>
+        </p:spPr>
+      </p:pic>
+      <p:pic>
+        <p:nvPicPr>
+          <p:cNvPr id="9" name="Picture 8">
+            <a:extLst>
+              <a:ext uri="{FF2B5EF4-FFF2-40B4-BE49-F238E27FC236}">
+                <a16:creationId xmlns:a16="http://schemas.microsoft.com/office/drawing/2014/main" id="{BCB1F1B1-4EE4-89B8-5F2A-BC37A33EE5CD}"/>
+              </a:ext>
+            </a:extLst>
+          </p:cNvPr>
+          <p:cNvPicPr>
+            <a:picLocks noChangeAspect="1"/>
+          </p:cNvPicPr>
+          <p:nvPr/>
+        </p:nvPicPr>
+        <p:blipFill>
+          <a:blip r:embed="rId4"/>
+          <a:stretch>
+            <a:fillRect/>
+          </a:stretch>
+        </p:blipFill>
+        <p:spPr>
+          <a:xfrm>
+            <a:off x="3218741" y="3145987"/>
+            <a:ext cx="3119848" cy="2757722"/>
+          </a:xfrm>
+          <a:prstGeom prst="rect">
+            <a:avLst/>
+          </a:prstGeom>
+        </p:spPr>
+      </p:pic>
+      <p:pic>
+        <p:nvPicPr>
+          <p:cNvPr id="11" name="Picture 10">
+            <a:extLst>
+              <a:ext uri="{FF2B5EF4-FFF2-40B4-BE49-F238E27FC236}">
+                <a16:creationId xmlns:a16="http://schemas.microsoft.com/office/drawing/2014/main" id="{FDF4BA60-20A7-2CC2-21AC-9E63892D6670}"/>
+              </a:ext>
+            </a:extLst>
+          </p:cNvPr>
+          <p:cNvPicPr>
+            <a:picLocks noChangeAspect="1"/>
+          </p:cNvPicPr>
+          <p:nvPr/>
+        </p:nvPicPr>
+        <p:blipFill>
+          <a:blip r:embed="rId5"/>
+          <a:stretch>
+            <a:fillRect/>
+          </a:stretch>
+        </p:blipFill>
+        <p:spPr>
+          <a:xfrm>
+            <a:off x="5021035" y="1735225"/>
+            <a:ext cx="3616556" cy="866084"/>
+          </a:xfrm>
+          <a:prstGeom prst="rect">
+            <a:avLst/>
+          </a:prstGeom>
+        </p:spPr>
+      </p:pic>
+    </p:spTree>
+    <p:extLst>
+      <p:ext uri="{BB962C8B-B14F-4D97-AF65-F5344CB8AC3E}">
+        <p14:creationId xmlns:p14="http://schemas.microsoft.com/office/powerpoint/2010/main" val="1050332411"/>
+      </p:ext>
+    </p:extLst>
+  </p:cSld>
+  <p:clrMapOvr>
+    <a:masterClrMapping/>
+  </p:clrMapOvr>
+</p:sld>
+</file>
+
+<file path=ppt/slides/slide12.xml><?xml version="1.0" encoding="utf-8"?>
+<p:sld xmlns:a="http://schemas.openxmlformats.org/drawingml/2006/main" xmlns:r="http://schemas.openxmlformats.org/officeDocument/2006/relationships" xmlns:p="http://schemas.openxmlformats.org/presentationml/2006/main">
+  <p:cSld>
+    <p:spTree>
+      <p:nvGrpSpPr>
+        <p:cNvPr id="1" name=""/>
+        <p:cNvGrpSpPr/>
+        <p:nvPr/>
+      </p:nvGrpSpPr>
+      <p:grpSpPr>
+        <a:xfrm>
+          <a:off x="0" y="0"/>
+          <a:ext cx="0" cy="0"/>
+          <a:chOff x="0" y="0"/>
+          <a:chExt cx="0" cy="0"/>
+        </a:xfrm>
+      </p:grpSpPr>
+      <p:sp>
+        <p:nvSpPr>
+          <p:cNvPr id="2" name="Text Placeholder 1">
+            <a:extLst>
+              <a:ext uri="{FF2B5EF4-FFF2-40B4-BE49-F238E27FC236}">
+                <a16:creationId xmlns:a16="http://schemas.microsoft.com/office/drawing/2014/main" id="{BA906C6D-FC50-8590-63C1-71685CCA6442}"/>
+              </a:ext>
+            </a:extLst>
+          </p:cNvPr>
+          <p:cNvSpPr>
+            <a:spLocks noGrp="1"/>
+          </p:cNvSpPr>
+          <p:nvPr>
+            <p:ph type="body" sz="quarter" idx="11"/>
+          </p:nvPr>
+        </p:nvSpPr>
+        <p:spPr/>
+        <p:txBody>
+          <a:bodyPr/>
+          <a:lstStyle/>
+          <a:p>
+            <a:r>
+              <a:rPr lang="en-US" dirty="0"/>
+              <a:t>Goals for next week</a:t>
+            </a:r>
+          </a:p>
+        </p:txBody>
+      </p:sp>
+      <p:sp>
+        <p:nvSpPr>
+          <p:cNvPr id="3" name="Text Placeholder 2">
+            <a:extLst>
+              <a:ext uri="{FF2B5EF4-FFF2-40B4-BE49-F238E27FC236}">
+                <a16:creationId xmlns:a16="http://schemas.microsoft.com/office/drawing/2014/main" id="{BFEA2F54-1ABF-E520-B82B-EAB7AFF8CCE8}"/>
+              </a:ext>
+            </a:extLst>
+          </p:cNvPr>
+          <p:cNvSpPr>
+            <a:spLocks noGrp="1"/>
+          </p:cNvSpPr>
+          <p:nvPr>
+            <p:ph type="body" sz="quarter" idx="10"/>
+          </p:nvPr>
+        </p:nvSpPr>
+        <p:spPr/>
+        <p:txBody>
+          <a:bodyPr/>
+          <a:lstStyle/>
+          <a:p>
+            <a:pPr marL="285750" indent="-285750">
+              <a:buFont typeface="Arial" panose="020B0604020202020204" pitchFamily="34" charset="0"/>
+              <a:buChar char="•"/>
+            </a:pPr>
+            <a:r>
+              <a:rPr lang="en-US" dirty="0"/>
+              <a:t>Finish System characterization and diagram for Pedro </a:t>
+            </a:r>
+          </a:p>
+          <a:p>
+            <a:pPr marL="285750" indent="-285750">
+              <a:buFont typeface="Arial" panose="020B0604020202020204" pitchFamily="34" charset="0"/>
+              <a:buChar char="•"/>
+            </a:pPr>
+            <a:r>
+              <a:rPr lang="en-US" dirty="0"/>
               <a:t>Ensure shipment is approved and gets sent to Professor Karcher</a:t>
+            </a:r>
+          </a:p>
+          <a:p>
+            <a:pPr marL="285750" indent="-285750">
+              <a:buFont typeface="Arial" panose="020B0604020202020204" pitchFamily="34" charset="0"/>
+              <a:buChar char="•"/>
+            </a:pPr>
+            <a:r>
+              <a:rPr lang="en-US" dirty="0"/>
+              <a:t>Ideate changes for Nicla backpack</a:t>
             </a:r>
           </a:p>
           <a:p>
@@ -13861,7 +14426,7 @@
 </p:sld>
 </file>
 
-<file path=ppt/slides/slide11.xml><?xml version="1.0" encoding="utf-8"?>
+<file path=ppt/slides/slide13.xml><?xml version="1.0" encoding="utf-8"?>
 <p:sld xmlns:a="http://schemas.openxmlformats.org/drawingml/2006/main" xmlns:r="http://schemas.openxmlformats.org/officeDocument/2006/relationships" xmlns:p="http://schemas.openxmlformats.org/presentationml/2006/main">
   <p:cSld>
     <p:spTree>
@@ -14058,7 +14623,17 @@
             </a:pPr>
             <a:r>
               <a:rPr lang="en-US" dirty="0"/>
-              <a:t>1</a:t>
+              <a:t>New Firmware flashed onto Arduino</a:t>
+            </a:r>
+          </a:p>
+          <a:p>
+            <a:pPr marL="285750" indent="-285750">
+              <a:buFont typeface="Arial" panose="020B0604020202020204" pitchFamily="34" charset="0"/>
+              <a:buChar char="•"/>
+            </a:pPr>
+            <a:r>
+              <a:rPr lang="en-US" dirty="0"/>
+              <a:t>Database Updates</a:t>
             </a:r>
           </a:p>
           <a:p>
@@ -14068,17 +14643,7 @@
             </a:pPr>
             <a:r>
               <a:rPr lang="en-US" dirty="0"/>
-              <a:t>2</a:t>
-            </a:r>
-          </a:p>
-          <a:p>
-            <a:pPr marL="285750" indent="-285750">
-              <a:buFont typeface="Arial" panose="020B0604020202020204" pitchFamily="34" charset="0"/>
-              <a:buChar char="•"/>
-            </a:pPr>
-            <a:r>
-              <a:rPr lang="en-US" dirty="0"/>
-              <a:t>Database Updates</a:t>
+              <a:t>Demo of Current Progress</a:t>
             </a:r>
           </a:p>
           <a:p>
@@ -14088,7 +14653,7 @@
             </a:pPr>
             <a:r>
               <a:rPr lang="en-US" dirty="0"/>
-              <a:t>Demo of Current Progress</a:t>
+              <a:t>Improvements Made (1)</a:t>
             </a:r>
           </a:p>
           <a:p>
@@ -14098,27 +14663,7 @@
             </a:pPr>
             <a:r>
               <a:rPr lang="en-US" dirty="0"/>
-              <a:t>Pitfalls and Issues Faced</a:t>
-            </a:r>
-          </a:p>
-          <a:p>
-            <a:pPr marL="628650" lvl="1" indent="-285750">
-              <a:buFont typeface="Arial" panose="020B0604020202020204" pitchFamily="34" charset="0"/>
-              <a:buChar char="•"/>
-            </a:pPr>
-            <a:r>
-              <a:rPr lang="en-US" dirty="0"/>
-              <a:t>Potential Reasons behind Certain Bugs</a:t>
-            </a:r>
-          </a:p>
-          <a:p>
-            <a:pPr marL="628650" lvl="1" indent="-285750">
-              <a:buFont typeface="Arial" panose="020B0604020202020204" pitchFamily="34" charset="0"/>
-              <a:buChar char="•"/>
-            </a:pPr>
-            <a:r>
-              <a:rPr lang="en-US" dirty="0"/>
-              <a:t>Improvements Made</a:t>
+              <a:t>Improvements Made (2)</a:t>
             </a:r>
           </a:p>
           <a:p>
@@ -14563,7 +15108,7 @@
           <a:p>
             <a:r>
               <a:rPr lang="en-US" dirty="0"/>
-              <a:t>1</a:t>
+              <a:t>New Firmware flashed onto Arduino</a:t>
             </a:r>
           </a:p>
         </p:txBody>
@@ -14589,7 +15134,24 @@
           <a:bodyPr/>
           <a:lstStyle/>
           <a:p>
-            <a:endParaRPr lang="en-US"/>
+            <a:pPr marL="285750" indent="-285750">
+              <a:buFont typeface="Arial" panose="020B0604020202020204" pitchFamily="34" charset="0"/>
+              <a:buChar char="•"/>
+            </a:pPr>
+            <a:r>
+              <a:rPr lang="en-US" dirty="0"/>
+              <a:t>Simple code to test all sensors connecting to database</a:t>
+            </a:r>
+          </a:p>
+          <a:p>
+            <a:pPr marL="285750" indent="-285750">
+              <a:buFont typeface="Arial" panose="020B0604020202020204" pitchFamily="34" charset="0"/>
+              <a:buChar char="•"/>
+            </a:pPr>
+            <a:r>
+              <a:rPr lang="en-US" dirty="0"/>
+              <a:t>Reduced all unnecessary links in code to reduce bugs</a:t>
+            </a:r>
           </a:p>
         </p:txBody>
       </p:sp>
@@ -14653,6 +15215,36 @@
           </a:p>
         </p:txBody>
       </p:sp>
+      <p:pic>
+        <p:nvPicPr>
+          <p:cNvPr id="7" name="Picture 6">
+            <a:extLst>
+              <a:ext uri="{FF2B5EF4-FFF2-40B4-BE49-F238E27FC236}">
+                <a16:creationId xmlns:a16="http://schemas.microsoft.com/office/drawing/2014/main" id="{59F88AA5-005B-D916-867D-58C8A60ACF68}"/>
+              </a:ext>
+            </a:extLst>
+          </p:cNvPr>
+          <p:cNvPicPr>
+            <a:picLocks noChangeAspect="1"/>
+          </p:cNvPicPr>
+          <p:nvPr/>
+        </p:nvPicPr>
+        <p:blipFill>
+          <a:blip r:embed="rId2"/>
+          <a:stretch>
+            <a:fillRect/>
+          </a:stretch>
+        </p:blipFill>
+        <p:spPr>
+          <a:xfrm>
+            <a:off x="2081545" y="2390534"/>
+            <a:ext cx="4972744" cy="3448531"/>
+          </a:xfrm>
+          <a:prstGeom prst="rect">
+            <a:avLst/>
+          </a:prstGeom>
+        </p:spPr>
+      </p:pic>
     </p:spTree>
     <p:extLst>
       <p:ext uri="{BB962C8B-B14F-4D97-AF65-F5344CB8AC3E}">
@@ -14671,10 +15263,158 @@
   <p:cSld>
     <p:spTree>
       <p:nvGrpSpPr>
+        <p:cNvPr id="1" name=""/>
+        <p:cNvGrpSpPr/>
+        <p:nvPr/>
+      </p:nvGrpSpPr>
+      <p:grpSpPr>
+        <a:xfrm>
+          <a:off x="0" y="0"/>
+          <a:ext cx="0" cy="0"/>
+          <a:chOff x="0" y="0"/>
+          <a:chExt cx="0" cy="0"/>
+        </a:xfrm>
+      </p:grpSpPr>
+      <p:sp>
+        <p:nvSpPr>
+          <p:cNvPr id="2" name="Text Placeholder 1">
+            <a:extLst>
+              <a:ext uri="{FF2B5EF4-FFF2-40B4-BE49-F238E27FC236}">
+                <a16:creationId xmlns:a16="http://schemas.microsoft.com/office/drawing/2014/main" id="{B7B83513-DDDD-99B3-18AF-2280A6430CAF}"/>
+              </a:ext>
+            </a:extLst>
+          </p:cNvPr>
+          <p:cNvSpPr>
+            <a:spLocks noGrp="1"/>
+          </p:cNvSpPr>
+          <p:nvPr>
+            <p:ph type="body" sz="quarter" idx="11"/>
+          </p:nvPr>
+        </p:nvSpPr>
+        <p:spPr/>
+        <p:txBody>
+          <a:bodyPr/>
+          <a:lstStyle/>
+          <a:p>
+            <a:r>
+              <a:rPr lang="en-US" dirty="0"/>
+              <a:t>Demo of Current Progress</a:t>
+            </a:r>
+          </a:p>
+        </p:txBody>
+      </p:sp>
+      <p:sp>
+        <p:nvSpPr>
+          <p:cNvPr id="3" name="Text Placeholder 2">
+            <a:extLst>
+              <a:ext uri="{FF2B5EF4-FFF2-40B4-BE49-F238E27FC236}">
+                <a16:creationId xmlns:a16="http://schemas.microsoft.com/office/drawing/2014/main" id="{3282DC29-3D18-5B6E-C83D-B4700475CDA0}"/>
+              </a:ext>
+            </a:extLst>
+          </p:cNvPr>
+          <p:cNvSpPr>
+            <a:spLocks noGrp="1"/>
+          </p:cNvSpPr>
+          <p:nvPr>
+            <p:ph type="body" sz="quarter" idx="10"/>
+          </p:nvPr>
+        </p:nvSpPr>
+        <p:spPr/>
+        <p:txBody>
+          <a:bodyPr/>
+          <a:lstStyle/>
+          <a:p>
+            <a:pPr marL="285750" indent="-285750">
+              <a:buFont typeface="Arial" panose="020B0604020202020204" pitchFamily="34" charset="0"/>
+              <a:buChar char="•"/>
+            </a:pPr>
+            <a:r>
+              <a:rPr lang="en-US" dirty="0"/>
+              <a:t>Video of Logging: https://www.youtube.com/watch?v=GDCnnC6DZ4</a:t>
+            </a:r>
+          </a:p>
+        </p:txBody>
+      </p:sp>
+      <p:sp>
+        <p:nvSpPr>
+          <p:cNvPr id="4" name="Title 3">
+            <a:extLst>
+              <a:ext uri="{FF2B5EF4-FFF2-40B4-BE49-F238E27FC236}">
+                <a16:creationId xmlns:a16="http://schemas.microsoft.com/office/drawing/2014/main" id="{F8D444C7-D5D8-0F66-BCA8-2C510C2A424A}"/>
+              </a:ext>
+            </a:extLst>
+          </p:cNvPr>
+          <p:cNvSpPr>
+            <a:spLocks noGrp="1"/>
+          </p:cNvSpPr>
+          <p:nvPr>
+            <p:ph type="title"/>
+          </p:nvPr>
+        </p:nvSpPr>
+        <p:spPr/>
+        <p:txBody>
+          <a:bodyPr/>
+          <a:lstStyle/>
+          <a:p>
+            <a:r>
+              <a:rPr lang="en-US" dirty="0"/>
+              <a:t>Database Changes</a:t>
+            </a:r>
+          </a:p>
+        </p:txBody>
+      </p:sp>
+      <p:sp>
+        <p:nvSpPr>
+          <p:cNvPr id="5" name="Footer Placeholder 4">
+            <a:extLst>
+              <a:ext uri="{FF2B5EF4-FFF2-40B4-BE49-F238E27FC236}">
+                <a16:creationId xmlns:a16="http://schemas.microsoft.com/office/drawing/2014/main" id="{A7F87A7F-EB6A-033F-49DF-3D749DA25AB2}"/>
+              </a:ext>
+            </a:extLst>
+          </p:cNvPr>
+          <p:cNvSpPr>
+            <a:spLocks noGrp="1"/>
+          </p:cNvSpPr>
+          <p:nvPr>
+            <p:ph type="ftr" sz="quarter" idx="12"/>
+          </p:nvPr>
+        </p:nvSpPr>
+        <p:spPr/>
+        <p:txBody>
+          <a:bodyPr/>
+          <a:lstStyle/>
+          <a:p>
+            <a:pPr algn="r"/>
+            <a:r>
+              <a:rPr lang="en-US"/>
+              <a:t>3/31/23            ‹#›</a:t>
+            </a:r>
+            <a:endParaRPr lang="en-US" dirty="0"/>
+          </a:p>
+        </p:txBody>
+      </p:sp>
+    </p:spTree>
+    <p:extLst>
+      <p:ext uri="{BB962C8B-B14F-4D97-AF65-F5344CB8AC3E}">
+        <p14:creationId xmlns:p14="http://schemas.microsoft.com/office/powerpoint/2010/main" val="2304352665"/>
+      </p:ext>
+    </p:extLst>
+  </p:cSld>
+  <p:clrMapOvr>
+    <a:masterClrMapping/>
+  </p:clrMapOvr>
+</p:sld>
+</file>
+
+<file path=ppt/slides/slide6.xml><?xml version="1.0" encoding="utf-8"?>
+<p:sld xmlns:a="http://schemas.openxmlformats.org/drawingml/2006/main" xmlns:r="http://schemas.openxmlformats.org/officeDocument/2006/relationships" xmlns:p="http://schemas.openxmlformats.org/presentationml/2006/main">
+  <p:cSld>
+    <p:spTree>
+      <p:nvGrpSpPr>
         <p:cNvPr id="1" name="">
           <a:extLst>
             <a:ext uri="{FF2B5EF4-FFF2-40B4-BE49-F238E27FC236}">
-              <a16:creationId xmlns:a16="http://schemas.microsoft.com/office/drawing/2014/main" id="{4FF34BBB-6D7A-9D53-6CC2-495927ED8FB8}"/>
+              <a16:creationId xmlns:a16="http://schemas.microsoft.com/office/drawing/2014/main" id="{057A8596-4441-859F-ABED-6399BB6EA58E}"/>
             </a:ext>
           </a:extLst>
         </p:cNvPr>
@@ -14694,7 +15434,7 @@
           <p:cNvPr id="2" name="Text Placeholder 1">
             <a:extLst>
               <a:ext uri="{FF2B5EF4-FFF2-40B4-BE49-F238E27FC236}">
-                <a16:creationId xmlns:a16="http://schemas.microsoft.com/office/drawing/2014/main" id="{D9BFDBB9-DF7A-B4EC-C3E8-AE98039E9C51}"/>
+                <a16:creationId xmlns:a16="http://schemas.microsoft.com/office/drawing/2014/main" id="{1CFD2D2C-D1EF-E89C-A110-54DAB94320AB}"/>
               </a:ext>
             </a:extLst>
           </p:cNvPr>
@@ -14712,7 +15452,7 @@
           <a:p>
             <a:r>
               <a:rPr lang="en-US" dirty="0"/>
-              <a:t>2</a:t>
+              <a:t>Improvements Made (1)</a:t>
             </a:r>
           </a:p>
         </p:txBody>
@@ -14722,7 +15462,7 @@
           <p:cNvPr id="3" name="Text Placeholder 2">
             <a:extLst>
               <a:ext uri="{FF2B5EF4-FFF2-40B4-BE49-F238E27FC236}">
-                <a16:creationId xmlns:a16="http://schemas.microsoft.com/office/drawing/2014/main" id="{10BF60B0-3459-12E5-A62E-98AE2450E2D7}"/>
+                <a16:creationId xmlns:a16="http://schemas.microsoft.com/office/drawing/2014/main" id="{30AC30F4-C3AE-1027-22F7-7D535A5C7701}"/>
               </a:ext>
             </a:extLst>
           </p:cNvPr>
@@ -14738,7 +15478,47 @@
           <a:bodyPr/>
           <a:lstStyle/>
           <a:p>
-            <a:endParaRPr lang="en-US"/>
+            <a:pPr marL="285750" indent="-285750">
+              <a:buFont typeface="Arial" panose="020B0604020202020204" pitchFamily="34" charset="0"/>
+              <a:buChar char="•"/>
+            </a:pPr>
+            <a:r>
+              <a:rPr lang="en-US" dirty="0"/>
+              <a:t>Logger time frame now only exports the needed data</a:t>
+            </a:r>
+          </a:p>
+          <a:p>
+            <a:pPr marL="285750" indent="-285750">
+              <a:buFont typeface="Arial" panose="020B0604020202020204" pitchFamily="34" charset="0"/>
+              <a:buChar char="•"/>
+            </a:pPr>
+            <a:r>
+              <a:rPr lang="en-US" dirty="0"/>
+              <a:t>Device UUID is now characterized so it is easy to identify</a:t>
+            </a:r>
+          </a:p>
+          <a:p>
+            <a:pPr marL="285750" indent="-285750">
+              <a:buFont typeface="Arial" panose="020B0604020202020204" pitchFamily="34" charset="0"/>
+              <a:buChar char="•"/>
+            </a:pPr>
+            <a:r>
+              <a:rPr lang="en-US" dirty="0"/>
+              <a:t>Previous Bugs: was calling database from all items</a:t>
+            </a:r>
+          </a:p>
+          <a:p>
+            <a:pPr marL="285750" indent="-285750">
+              <a:buFont typeface="Arial" panose="020B0604020202020204" pitchFamily="34" charset="0"/>
+              <a:buChar char="•"/>
+            </a:pPr>
+            <a:r>
+              <a:rPr lang="en-US" dirty="0"/>
+              <a:t>New Code seen below:</a:t>
+            </a:r>
+          </a:p>
+          <a:p>
+            <a:endParaRPr lang="en-US" dirty="0"/>
           </a:p>
         </p:txBody>
       </p:sp>
@@ -14747,7 +15527,7 @@
           <p:cNvPr id="4" name="Title 3">
             <a:extLst>
               <a:ext uri="{FF2B5EF4-FFF2-40B4-BE49-F238E27FC236}">
-                <a16:creationId xmlns:a16="http://schemas.microsoft.com/office/drawing/2014/main" id="{5F45BA4B-DE06-B42C-E6B3-B4C80800362A}"/>
+                <a16:creationId xmlns:a16="http://schemas.microsoft.com/office/drawing/2014/main" id="{1AB182F5-4312-FC2A-2688-3D562FA643AE}"/>
               </a:ext>
             </a:extLst>
           </p:cNvPr>
@@ -14756,36 +15536,6 @@
           </p:cNvSpPr>
           <p:nvPr>
             <p:ph type="title"/>
-          </p:nvPr>
-        </p:nvSpPr>
-        <p:spPr/>
-        <p:txBody>
-          <a:bodyPr>
-            <a:normAutofit/>
-          </a:bodyPr>
-          <a:lstStyle/>
-          <a:p>
-            <a:r>
-              <a:rPr lang="en-US" dirty="0"/>
-              <a:t>Firmware Changes</a:t>
-            </a:r>
-          </a:p>
-        </p:txBody>
-      </p:sp>
-      <p:sp>
-        <p:nvSpPr>
-          <p:cNvPr id="5" name="Footer Placeholder 4">
-            <a:extLst>
-              <a:ext uri="{FF2B5EF4-FFF2-40B4-BE49-F238E27FC236}">
-                <a16:creationId xmlns:a16="http://schemas.microsoft.com/office/drawing/2014/main" id="{B4F02264-BE19-D1A4-D6D4-5F7B0A030B51}"/>
-              </a:ext>
-            </a:extLst>
-          </p:cNvPr>
-          <p:cNvSpPr>
-            <a:spLocks noGrp="1"/>
-          </p:cNvSpPr>
-          <p:nvPr>
-            <p:ph type="ftr" sz="quarter" idx="12"/>
           </p:nvPr>
         </p:nvSpPr>
         <p:spPr/>
@@ -14793,6 +15543,34 @@
           <a:bodyPr/>
           <a:lstStyle/>
           <a:p>
+            <a:r>
+              <a:rPr lang="en-US" dirty="0"/>
+              <a:t>Database Changes</a:t>
+            </a:r>
+          </a:p>
+        </p:txBody>
+      </p:sp>
+      <p:sp>
+        <p:nvSpPr>
+          <p:cNvPr id="5" name="Footer Placeholder 4">
+            <a:extLst>
+              <a:ext uri="{FF2B5EF4-FFF2-40B4-BE49-F238E27FC236}">
+                <a16:creationId xmlns:a16="http://schemas.microsoft.com/office/drawing/2014/main" id="{AD8B2038-728B-94CF-6323-58DCE0373C8F}"/>
+              </a:ext>
+            </a:extLst>
+          </p:cNvPr>
+          <p:cNvSpPr>
+            <a:spLocks noGrp="1"/>
+          </p:cNvSpPr>
+          <p:nvPr>
+            <p:ph type="ftr" sz="quarter" idx="12"/>
+          </p:nvPr>
+        </p:nvSpPr>
+        <p:spPr/>
+        <p:txBody>
+          <a:bodyPr/>
+          <a:lstStyle/>
+          <a:p>
             <a:pPr algn="r"/>
             <a:r>
               <a:rPr lang="en-US"/>
@@ -14802,10 +15580,40 @@
           </a:p>
         </p:txBody>
       </p:sp>
+      <p:pic>
+        <p:nvPicPr>
+          <p:cNvPr id="7" name="Picture 6">
+            <a:extLst>
+              <a:ext uri="{FF2B5EF4-FFF2-40B4-BE49-F238E27FC236}">
+                <a16:creationId xmlns:a16="http://schemas.microsoft.com/office/drawing/2014/main" id="{8D9C3C04-B3D2-25B9-C641-746309225BA8}"/>
+              </a:ext>
+            </a:extLst>
+          </p:cNvPr>
+          <p:cNvPicPr>
+            <a:picLocks noChangeAspect="1"/>
+          </p:cNvPicPr>
+          <p:nvPr/>
+        </p:nvPicPr>
+        <p:blipFill>
+          <a:blip r:embed="rId2"/>
+          <a:stretch>
+            <a:fillRect/>
+          </a:stretch>
+        </p:blipFill>
+        <p:spPr>
+          <a:xfrm>
+            <a:off x="1252754" y="3091144"/>
+            <a:ext cx="6630325" cy="2857899"/>
+          </a:xfrm>
+          <a:prstGeom prst="rect">
+            <a:avLst/>
+          </a:prstGeom>
+        </p:spPr>
+      </p:pic>
     </p:spTree>
     <p:extLst>
       <p:ext uri="{BB962C8B-B14F-4D97-AF65-F5344CB8AC3E}">
-        <p14:creationId xmlns:p14="http://schemas.microsoft.com/office/powerpoint/2010/main" val="4629584"/>
+        <p14:creationId xmlns:p14="http://schemas.microsoft.com/office/powerpoint/2010/main" val="629282721"/>
       </p:ext>
     </p:extLst>
   </p:cSld>
@@ -14815,7 +15623,223 @@
 </p:sld>
 </file>
 
-<file path=ppt/slides/slide6.xml><?xml version="1.0" encoding="utf-8"?>
+<file path=ppt/slides/slide7.xml><?xml version="1.0" encoding="utf-8"?>
+<p:sld xmlns:a="http://schemas.openxmlformats.org/drawingml/2006/main" xmlns:r="http://schemas.openxmlformats.org/officeDocument/2006/relationships" xmlns:p="http://schemas.openxmlformats.org/presentationml/2006/main">
+  <p:cSld>
+    <p:spTree>
+      <p:nvGrpSpPr>
+        <p:cNvPr id="1" name="">
+          <a:extLst>
+            <a:ext uri="{FF2B5EF4-FFF2-40B4-BE49-F238E27FC236}">
+              <a16:creationId xmlns:a16="http://schemas.microsoft.com/office/drawing/2014/main" id="{654D4720-C3C5-E873-C061-E860FE314D27}"/>
+            </a:ext>
+          </a:extLst>
+        </p:cNvPr>
+        <p:cNvGrpSpPr/>
+        <p:nvPr/>
+      </p:nvGrpSpPr>
+      <p:grpSpPr>
+        <a:xfrm>
+          <a:off x="0" y="0"/>
+          <a:ext cx="0" cy="0"/>
+          <a:chOff x="0" y="0"/>
+          <a:chExt cx="0" cy="0"/>
+        </a:xfrm>
+      </p:grpSpPr>
+      <p:sp>
+        <p:nvSpPr>
+          <p:cNvPr id="2" name="Text Placeholder 1">
+            <a:extLst>
+              <a:ext uri="{FF2B5EF4-FFF2-40B4-BE49-F238E27FC236}">
+                <a16:creationId xmlns:a16="http://schemas.microsoft.com/office/drawing/2014/main" id="{7F27F85A-BF6C-F741-2A2A-B33CA88380FD}"/>
+              </a:ext>
+            </a:extLst>
+          </p:cNvPr>
+          <p:cNvSpPr>
+            <a:spLocks noGrp="1"/>
+          </p:cNvSpPr>
+          <p:nvPr>
+            <p:ph type="body" sz="quarter" idx="11"/>
+          </p:nvPr>
+        </p:nvSpPr>
+        <p:spPr/>
+        <p:txBody>
+          <a:bodyPr/>
+          <a:lstStyle/>
+          <a:p>
+            <a:r>
+              <a:rPr lang="en-US" dirty="0"/>
+              <a:t>Improvements Made (1)</a:t>
+            </a:r>
+          </a:p>
+        </p:txBody>
+      </p:sp>
+      <p:sp>
+        <p:nvSpPr>
+          <p:cNvPr id="3" name="Text Placeholder 2">
+            <a:extLst>
+              <a:ext uri="{FF2B5EF4-FFF2-40B4-BE49-F238E27FC236}">
+                <a16:creationId xmlns:a16="http://schemas.microsoft.com/office/drawing/2014/main" id="{7D6BC851-D4DF-9A1C-1483-39B07BFBCDF7}"/>
+              </a:ext>
+            </a:extLst>
+          </p:cNvPr>
+          <p:cNvSpPr>
+            <a:spLocks noGrp="1"/>
+          </p:cNvSpPr>
+          <p:nvPr>
+            <p:ph type="body" sz="quarter" idx="10"/>
+          </p:nvPr>
+        </p:nvSpPr>
+        <p:spPr/>
+        <p:txBody>
+          <a:bodyPr/>
+          <a:lstStyle/>
+          <a:p>
+            <a:pPr marL="285750" indent="-285750">
+              <a:buFont typeface="Arial" panose="020B0604020202020204" pitchFamily="34" charset="0"/>
+              <a:buChar char="•"/>
+            </a:pPr>
+            <a:r>
+              <a:rPr lang="en-US" dirty="0"/>
+              <a:t>Backend Database Package has full integrity</a:t>
+            </a:r>
+          </a:p>
+          <a:p>
+            <a:pPr marL="285750" indent="-285750">
+              <a:buFont typeface="Arial" panose="020B0604020202020204" pitchFamily="34" charset="0"/>
+              <a:buChar char="•"/>
+            </a:pPr>
+            <a:r>
+              <a:rPr lang="en-US" dirty="0"/>
+              <a:t>All entries packaged and present</a:t>
+            </a:r>
+          </a:p>
+          <a:p>
+            <a:pPr marL="285750" indent="-285750">
+              <a:buFont typeface="Arial" panose="020B0604020202020204" pitchFamily="34" charset="0"/>
+              <a:buChar char="•"/>
+            </a:pPr>
+            <a:r>
+              <a:rPr lang="en-US" dirty="0"/>
+              <a:t>Built simple, light test app </a:t>
+            </a:r>
+            <a:r>
+              <a:rPr lang="en-US"/>
+              <a:t>to verify</a:t>
+            </a:r>
+            <a:endParaRPr lang="en-US" dirty="0"/>
+          </a:p>
+          <a:p>
+            <a:pPr marL="285750" indent="-285750">
+              <a:buFont typeface="Arial" panose="020B0604020202020204" pitchFamily="34" charset="0"/>
+              <a:buChar char="•"/>
+            </a:pPr>
+            <a:endParaRPr lang="en-US" dirty="0"/>
+          </a:p>
+        </p:txBody>
+      </p:sp>
+      <p:sp>
+        <p:nvSpPr>
+          <p:cNvPr id="4" name="Title 3">
+            <a:extLst>
+              <a:ext uri="{FF2B5EF4-FFF2-40B4-BE49-F238E27FC236}">
+                <a16:creationId xmlns:a16="http://schemas.microsoft.com/office/drawing/2014/main" id="{172E8874-4DDF-59D8-713E-10B20437A9AC}"/>
+              </a:ext>
+            </a:extLst>
+          </p:cNvPr>
+          <p:cNvSpPr>
+            <a:spLocks noGrp="1"/>
+          </p:cNvSpPr>
+          <p:nvPr>
+            <p:ph type="title"/>
+          </p:nvPr>
+        </p:nvSpPr>
+        <p:spPr/>
+        <p:txBody>
+          <a:bodyPr/>
+          <a:lstStyle/>
+          <a:p>
+            <a:r>
+              <a:rPr lang="en-US" dirty="0"/>
+              <a:t>Database Changes</a:t>
+            </a:r>
+          </a:p>
+        </p:txBody>
+      </p:sp>
+      <p:sp>
+        <p:nvSpPr>
+          <p:cNvPr id="5" name="Footer Placeholder 4">
+            <a:extLst>
+              <a:ext uri="{FF2B5EF4-FFF2-40B4-BE49-F238E27FC236}">
+                <a16:creationId xmlns:a16="http://schemas.microsoft.com/office/drawing/2014/main" id="{EEF4D665-4D3F-DE89-2FDF-A442C55EE053}"/>
+              </a:ext>
+            </a:extLst>
+          </p:cNvPr>
+          <p:cNvSpPr>
+            <a:spLocks noGrp="1"/>
+          </p:cNvSpPr>
+          <p:nvPr>
+            <p:ph type="ftr" sz="quarter" idx="12"/>
+          </p:nvPr>
+        </p:nvSpPr>
+        <p:spPr/>
+        <p:txBody>
+          <a:bodyPr/>
+          <a:lstStyle/>
+          <a:p>
+            <a:pPr algn="r"/>
+            <a:r>
+              <a:rPr lang="en-US"/>
+              <a:t>3/31/23            ‹#›</a:t>
+            </a:r>
+            <a:endParaRPr lang="en-US" dirty="0"/>
+          </a:p>
+        </p:txBody>
+      </p:sp>
+      <p:pic>
+        <p:nvPicPr>
+          <p:cNvPr id="8" name="Picture 7">
+            <a:extLst>
+              <a:ext uri="{FF2B5EF4-FFF2-40B4-BE49-F238E27FC236}">
+                <a16:creationId xmlns:a16="http://schemas.microsoft.com/office/drawing/2014/main" id="{7C40ED55-46F2-5CEA-EC73-7B5FE8E844EE}"/>
+              </a:ext>
+            </a:extLst>
+          </p:cNvPr>
+          <p:cNvPicPr>
+            <a:picLocks noChangeAspect="1"/>
+          </p:cNvPicPr>
+          <p:nvPr/>
+        </p:nvPicPr>
+        <p:blipFill>
+          <a:blip r:embed="rId2"/>
+          <a:stretch>
+            <a:fillRect/>
+          </a:stretch>
+        </p:blipFill>
+        <p:spPr>
+          <a:xfrm>
+            <a:off x="4935969" y="2089601"/>
+            <a:ext cx="2764757" cy="3814108"/>
+          </a:xfrm>
+          <a:prstGeom prst="rect">
+            <a:avLst/>
+          </a:prstGeom>
+        </p:spPr>
+      </p:pic>
+    </p:spTree>
+    <p:extLst>
+      <p:ext uri="{BB962C8B-B14F-4D97-AF65-F5344CB8AC3E}">
+        <p14:creationId xmlns:p14="http://schemas.microsoft.com/office/powerpoint/2010/main" val="1621517390"/>
+      </p:ext>
+    </p:extLst>
+  </p:cSld>
+  <p:clrMapOvr>
+    <a:masterClrMapping/>
+  </p:clrMapOvr>
+</p:sld>
+</file>
+
+<file path=ppt/slides/slide8.xml><?xml version="1.0" encoding="utf-8"?>
 <p:sld xmlns:a="http://schemas.openxmlformats.org/drawingml/2006/main" xmlns:r="http://schemas.openxmlformats.org/officeDocument/2006/relationships" xmlns:p="http://schemas.openxmlformats.org/presentationml/2006/main">
   <p:cSld>
     <p:spTree>
@@ -15184,557 +16208,6 @@
 </p:sld>
 </file>
 
-<file path=ppt/slides/slide7.xml><?xml version="1.0" encoding="utf-8"?>
-<p:sld xmlns:a="http://schemas.openxmlformats.org/drawingml/2006/main" xmlns:r="http://schemas.openxmlformats.org/officeDocument/2006/relationships" xmlns:p="http://schemas.openxmlformats.org/presentationml/2006/main">
-  <p:cSld>
-    <p:spTree>
-      <p:nvGrpSpPr>
-        <p:cNvPr id="1" name=""/>
-        <p:cNvGrpSpPr/>
-        <p:nvPr/>
-      </p:nvGrpSpPr>
-      <p:grpSpPr>
-        <a:xfrm>
-          <a:off x="0" y="0"/>
-          <a:ext cx="0" cy="0"/>
-          <a:chOff x="0" y="0"/>
-          <a:chExt cx="0" cy="0"/>
-        </a:xfrm>
-      </p:grpSpPr>
-      <p:sp>
-        <p:nvSpPr>
-          <p:cNvPr id="2" name="Text Placeholder 1">
-            <a:extLst>
-              <a:ext uri="{FF2B5EF4-FFF2-40B4-BE49-F238E27FC236}">
-                <a16:creationId xmlns:a16="http://schemas.microsoft.com/office/drawing/2014/main" id="{2079E08A-4FD3-EA68-33BE-4C3AA2EC51B6}"/>
-              </a:ext>
-            </a:extLst>
-          </p:cNvPr>
-          <p:cNvSpPr>
-            <a:spLocks noGrp="1"/>
-          </p:cNvSpPr>
-          <p:nvPr>
-            <p:ph type="body" sz="quarter" idx="11"/>
-          </p:nvPr>
-        </p:nvSpPr>
-        <p:spPr/>
-        <p:txBody>
-          <a:bodyPr/>
-          <a:lstStyle/>
-          <a:p>
-            <a:r>
-              <a:rPr lang="en-US" dirty="0"/>
-              <a:t>Proposed Solution</a:t>
-            </a:r>
-          </a:p>
-          <a:p>
-            <a:endParaRPr lang="en-US" dirty="0"/>
-          </a:p>
-        </p:txBody>
-      </p:sp>
-      <p:sp>
-        <p:nvSpPr>
-          <p:cNvPr id="3" name="Text Placeholder 2">
-            <a:extLst>
-              <a:ext uri="{FF2B5EF4-FFF2-40B4-BE49-F238E27FC236}">
-                <a16:creationId xmlns:a16="http://schemas.microsoft.com/office/drawing/2014/main" id="{28C625F3-F03F-B74C-DFCB-2CF8F25AF5BF}"/>
-              </a:ext>
-            </a:extLst>
-          </p:cNvPr>
-          <p:cNvSpPr>
-            <a:spLocks noGrp="1"/>
-          </p:cNvSpPr>
-          <p:nvPr>
-            <p:ph type="body" sz="quarter" idx="10"/>
-          </p:nvPr>
-        </p:nvSpPr>
-        <p:spPr/>
-        <p:txBody>
-          <a:bodyPr/>
-          <a:lstStyle/>
-          <a:p>
-            <a:pPr marL="285750" indent="-285750">
-              <a:buFont typeface="Arial" panose="020B0604020202020204" pitchFamily="34" charset="0"/>
-              <a:buChar char="•"/>
-            </a:pPr>
-            <a:r>
-              <a:rPr lang="en-US" dirty="0"/>
-              <a:t>A lot of these wires </a:t>
-            </a:r>
-            <a:r>
-              <a:rPr lang="en-US" dirty="0">
-                <a:hlinkClick r:id="rId2"/>
-              </a:rPr>
-              <a:t>exist</a:t>
-            </a:r>
-            <a:r>
-              <a:rPr lang="en-US" dirty="0"/>
-              <a:t>, but none fit the given specification</a:t>
-            </a:r>
-          </a:p>
-          <a:p>
-            <a:pPr marL="285750" indent="-285750">
-              <a:buFont typeface="Arial" panose="020B0604020202020204" pitchFamily="34" charset="0"/>
-              <a:buChar char="•"/>
-            </a:pPr>
-            <a:r>
-              <a:rPr lang="en-US" dirty="0">
-                <a:hlinkClick r:id="rId3"/>
-              </a:rPr>
-              <a:t>Seen below</a:t>
-            </a:r>
-            <a:r>
-              <a:rPr lang="en-US" dirty="0"/>
-              <a:t>, one of these ends is always wrong or not specified with the correct header casing</a:t>
-            </a:r>
-          </a:p>
-          <a:p>
-            <a:pPr marL="285750" indent="-285750">
-              <a:buFont typeface="Arial" panose="020B0604020202020204" pitchFamily="34" charset="0"/>
-              <a:buChar char="•"/>
-            </a:pPr>
-            <a:r>
-              <a:rPr lang="en-US" dirty="0"/>
-              <a:t>One approach is to use the right picture and connect a </a:t>
-            </a:r>
-            <a:r>
-              <a:rPr lang="en-US" dirty="0">
-                <a:hlinkClick r:id="rId4"/>
-              </a:rPr>
-              <a:t>3-pin male header → 2 pin male header</a:t>
-            </a:r>
-            <a:r>
-              <a:rPr lang="en-US" dirty="0"/>
-              <a:t>, as seen below, but we would lose a lot of signal integrity</a:t>
-            </a:r>
-          </a:p>
-          <a:p>
-            <a:endParaRPr lang="en-US" dirty="0"/>
-          </a:p>
-        </p:txBody>
-      </p:sp>
-      <p:sp>
-        <p:nvSpPr>
-          <p:cNvPr id="4" name="Title 3">
-            <a:extLst>
-              <a:ext uri="{FF2B5EF4-FFF2-40B4-BE49-F238E27FC236}">
-                <a16:creationId xmlns:a16="http://schemas.microsoft.com/office/drawing/2014/main" id="{47A890D8-38BC-737E-2454-9DF3743E377F}"/>
-              </a:ext>
-            </a:extLst>
-          </p:cNvPr>
-          <p:cNvSpPr>
-            <a:spLocks noGrp="1"/>
-          </p:cNvSpPr>
-          <p:nvPr>
-            <p:ph type="title"/>
-          </p:nvPr>
-        </p:nvSpPr>
-        <p:spPr/>
-        <p:txBody>
-          <a:bodyPr>
-            <a:normAutofit/>
-          </a:bodyPr>
-          <a:lstStyle/>
-          <a:p>
-            <a:r>
-              <a:rPr lang="en-US" dirty="0"/>
-              <a:t>Supply Updates</a:t>
-            </a:r>
-          </a:p>
-        </p:txBody>
-      </p:sp>
-      <p:sp>
-        <p:nvSpPr>
-          <p:cNvPr id="5" name="Footer Placeholder 4">
-            <a:extLst>
-              <a:ext uri="{FF2B5EF4-FFF2-40B4-BE49-F238E27FC236}">
-                <a16:creationId xmlns:a16="http://schemas.microsoft.com/office/drawing/2014/main" id="{DC6225A3-B523-8791-8782-FB8349DDD1F7}"/>
-              </a:ext>
-            </a:extLst>
-          </p:cNvPr>
-          <p:cNvSpPr>
-            <a:spLocks noGrp="1"/>
-          </p:cNvSpPr>
-          <p:nvPr>
-            <p:ph type="ftr" sz="quarter" idx="12"/>
-          </p:nvPr>
-        </p:nvSpPr>
-        <p:spPr/>
-        <p:txBody>
-          <a:bodyPr/>
-          <a:lstStyle/>
-          <a:p>
-            <a:pPr algn="r"/>
-            <a:r>
-              <a:rPr lang="en-US"/>
-              <a:t>3/31/23            ‹#›</a:t>
-            </a:r>
-            <a:endParaRPr lang="en-US" dirty="0"/>
-          </a:p>
-        </p:txBody>
-      </p:sp>
-      <p:pic>
-        <p:nvPicPr>
-          <p:cNvPr id="7" name="Picture 6">
-            <a:extLst>
-              <a:ext uri="{FF2B5EF4-FFF2-40B4-BE49-F238E27FC236}">
-                <a16:creationId xmlns:a16="http://schemas.microsoft.com/office/drawing/2014/main" id="{EDEF085C-7CB4-66F2-5DB5-3DD474CE6B6B}"/>
-              </a:ext>
-            </a:extLst>
-          </p:cNvPr>
-          <p:cNvPicPr>
-            <a:picLocks noChangeAspect="1"/>
-          </p:cNvPicPr>
-          <p:nvPr/>
-        </p:nvPicPr>
-        <p:blipFill>
-          <a:blip r:embed="rId5"/>
-          <a:stretch>
-            <a:fillRect/>
-          </a:stretch>
-        </p:blipFill>
-        <p:spPr>
-          <a:xfrm>
-            <a:off x="3924981" y="4522286"/>
-            <a:ext cx="5219019" cy="2096742"/>
-          </a:xfrm>
-          <a:prstGeom prst="rect">
-            <a:avLst/>
-          </a:prstGeom>
-        </p:spPr>
-      </p:pic>
-      <p:pic>
-        <p:nvPicPr>
-          <p:cNvPr id="9" name="Picture 8">
-            <a:extLst>
-              <a:ext uri="{FF2B5EF4-FFF2-40B4-BE49-F238E27FC236}">
-                <a16:creationId xmlns:a16="http://schemas.microsoft.com/office/drawing/2014/main" id="{9E8EAFE3-9604-37A7-E233-9C31373F9BE4}"/>
-              </a:ext>
-            </a:extLst>
-          </p:cNvPr>
-          <p:cNvPicPr>
-            <a:picLocks noChangeAspect="1"/>
-          </p:cNvPicPr>
-          <p:nvPr/>
-        </p:nvPicPr>
-        <p:blipFill>
-          <a:blip r:embed="rId6"/>
-          <a:stretch>
-            <a:fillRect/>
-          </a:stretch>
-        </p:blipFill>
-        <p:spPr>
-          <a:xfrm>
-            <a:off x="351064" y="4069793"/>
-            <a:ext cx="2987526" cy="1928237"/>
-          </a:xfrm>
-          <a:prstGeom prst="rect">
-            <a:avLst/>
-          </a:prstGeom>
-        </p:spPr>
-      </p:pic>
-      <p:pic>
-        <p:nvPicPr>
-          <p:cNvPr id="11" name="Picture 10">
-            <a:extLst>
-              <a:ext uri="{FF2B5EF4-FFF2-40B4-BE49-F238E27FC236}">
-                <a16:creationId xmlns:a16="http://schemas.microsoft.com/office/drawing/2014/main" id="{DC306EDE-1216-67A3-CDF7-C74E18F76B2F}"/>
-              </a:ext>
-            </a:extLst>
-          </p:cNvPr>
-          <p:cNvPicPr>
-            <a:picLocks noChangeAspect="1"/>
-          </p:cNvPicPr>
-          <p:nvPr/>
-        </p:nvPicPr>
-        <p:blipFill>
-          <a:blip r:embed="rId7"/>
-          <a:stretch>
-            <a:fillRect/>
-          </a:stretch>
-        </p:blipFill>
-        <p:spPr>
-          <a:xfrm>
-            <a:off x="3420968" y="3168112"/>
-            <a:ext cx="2022570" cy="1374311"/>
-          </a:xfrm>
-          <a:prstGeom prst="rect">
-            <a:avLst/>
-          </a:prstGeom>
-        </p:spPr>
-      </p:pic>
-    </p:spTree>
-    <p:extLst>
-      <p:ext uri="{BB962C8B-B14F-4D97-AF65-F5344CB8AC3E}">
-        <p14:creationId xmlns:p14="http://schemas.microsoft.com/office/powerpoint/2010/main" val="525877017"/>
-      </p:ext>
-    </p:extLst>
-  </p:cSld>
-  <p:clrMapOvr>
-    <a:masterClrMapping/>
-  </p:clrMapOvr>
-</p:sld>
-</file>
-
-<file path=ppt/slides/slide8.xml><?xml version="1.0" encoding="utf-8"?>
-<p:sld xmlns:a="http://schemas.openxmlformats.org/drawingml/2006/main" xmlns:r="http://schemas.openxmlformats.org/officeDocument/2006/relationships" xmlns:p="http://schemas.openxmlformats.org/presentationml/2006/main">
-  <p:cSld>
-    <p:spTree>
-      <p:nvGrpSpPr>
-        <p:cNvPr id="1" name=""/>
-        <p:cNvGrpSpPr/>
-        <p:nvPr/>
-      </p:nvGrpSpPr>
-      <p:grpSpPr>
-        <a:xfrm>
-          <a:off x="0" y="0"/>
-          <a:ext cx="0" cy="0"/>
-          <a:chOff x="0" y="0"/>
-          <a:chExt cx="0" cy="0"/>
-        </a:xfrm>
-      </p:grpSpPr>
-      <p:sp>
-        <p:nvSpPr>
-          <p:cNvPr id="2" name="Text Placeholder 1">
-            <a:extLst>
-              <a:ext uri="{FF2B5EF4-FFF2-40B4-BE49-F238E27FC236}">
-                <a16:creationId xmlns:a16="http://schemas.microsoft.com/office/drawing/2014/main" id="{8C8FF36B-651C-9572-A167-1F25B76D5758}"/>
-              </a:ext>
-            </a:extLst>
-          </p:cNvPr>
-          <p:cNvSpPr>
-            <a:spLocks noGrp="1"/>
-          </p:cNvSpPr>
-          <p:nvPr>
-            <p:ph type="body" sz="quarter" idx="11"/>
-          </p:nvPr>
-        </p:nvSpPr>
-        <p:spPr/>
-        <p:txBody>
-          <a:bodyPr/>
-          <a:lstStyle/>
-          <a:p>
-            <a:r>
-              <a:rPr lang="en-US" dirty="0"/>
-              <a:t>Purchased Solution</a:t>
-            </a:r>
-          </a:p>
-          <a:p>
-            <a:endParaRPr lang="en-US" dirty="0"/>
-          </a:p>
-        </p:txBody>
-      </p:sp>
-      <p:sp>
-        <p:nvSpPr>
-          <p:cNvPr id="3" name="Text Placeholder 2">
-            <a:extLst>
-              <a:ext uri="{FF2B5EF4-FFF2-40B4-BE49-F238E27FC236}">
-                <a16:creationId xmlns:a16="http://schemas.microsoft.com/office/drawing/2014/main" id="{745A5B72-4829-689E-B04D-5C58E8EDF223}"/>
-              </a:ext>
-            </a:extLst>
-          </p:cNvPr>
-          <p:cNvSpPr>
-            <a:spLocks noGrp="1"/>
-          </p:cNvSpPr>
-          <p:nvPr>
-            <p:ph type="body" sz="quarter" idx="10"/>
-          </p:nvPr>
-        </p:nvSpPr>
-        <p:spPr/>
-        <p:txBody>
-          <a:bodyPr/>
-          <a:lstStyle/>
-          <a:p>
-            <a:pPr marL="285750" indent="-285750">
-              <a:buFont typeface="Arial" panose="020B0604020202020204" pitchFamily="34" charset="0"/>
-              <a:buChar char="•"/>
-            </a:pPr>
-            <a:r>
-              <a:rPr lang="en-US" dirty="0"/>
-              <a:t>What I think is the best solution is to use an alternative cable with no adverse effects</a:t>
-            </a:r>
-          </a:p>
-          <a:p>
-            <a:pPr marL="285750" indent="-285750">
-              <a:buFont typeface="Arial" panose="020B0604020202020204" pitchFamily="34" charset="0"/>
-              <a:buChar char="•"/>
-            </a:pPr>
-            <a:r>
-              <a:rPr lang="en-US" dirty="0"/>
-              <a:t>The GPIO header on most boards uses the same connector, so we can take advantage of that</a:t>
-            </a:r>
-          </a:p>
-          <a:p>
-            <a:pPr marL="285750" indent="-285750">
-              <a:buFont typeface="Arial" panose="020B0604020202020204" pitchFamily="34" charset="0"/>
-              <a:buChar char="•"/>
-            </a:pPr>
-            <a:r>
-              <a:rPr lang="en-US" dirty="0"/>
-              <a:t>A </a:t>
-            </a:r>
-            <a:r>
-              <a:rPr lang="en-US" dirty="0">
-                <a:hlinkClick r:id="rId2"/>
-              </a:rPr>
-              <a:t>version</a:t>
-            </a:r>
-            <a:r>
-              <a:rPr lang="en-US" dirty="0"/>
-              <a:t> of the DuPont header to </a:t>
-            </a:r>
-            <a:r>
-              <a:rPr lang="en-US" u="sng" dirty="0"/>
-              <a:t>GPIO</a:t>
-            </a:r>
-            <a:r>
-              <a:rPr lang="en-US" dirty="0"/>
-              <a:t> 2 JST Pin Male Header exists, which is exactly what we need</a:t>
-            </a:r>
-          </a:p>
-          <a:p>
-            <a:pPr marL="285750" indent="-285750">
-              <a:buFont typeface="Arial" panose="020B0604020202020204" pitchFamily="34" charset="0"/>
-              <a:buChar char="•"/>
-            </a:pPr>
-            <a:r>
-              <a:rPr lang="en-US" dirty="0"/>
-              <a:t>We might run into signal integrity issues, but there will be no connectivity issues. This version is also short (as the Agriculture department requested)</a:t>
-            </a:r>
-          </a:p>
-        </p:txBody>
-      </p:sp>
-      <p:sp>
-        <p:nvSpPr>
-          <p:cNvPr id="4" name="Title 3">
-            <a:extLst>
-              <a:ext uri="{FF2B5EF4-FFF2-40B4-BE49-F238E27FC236}">
-                <a16:creationId xmlns:a16="http://schemas.microsoft.com/office/drawing/2014/main" id="{8151768E-DCEC-5979-692E-539682445199}"/>
-              </a:ext>
-            </a:extLst>
-          </p:cNvPr>
-          <p:cNvSpPr>
-            <a:spLocks noGrp="1"/>
-          </p:cNvSpPr>
-          <p:nvPr>
-            <p:ph type="title"/>
-          </p:nvPr>
-        </p:nvSpPr>
-        <p:spPr/>
-        <p:txBody>
-          <a:bodyPr/>
-          <a:lstStyle/>
-          <a:p>
-            <a:r>
-              <a:rPr lang="en-US" dirty="0"/>
-              <a:t>Supply Updates</a:t>
-            </a:r>
-          </a:p>
-        </p:txBody>
-      </p:sp>
-      <p:sp>
-        <p:nvSpPr>
-          <p:cNvPr id="5" name="Footer Placeholder 4">
-            <a:extLst>
-              <a:ext uri="{FF2B5EF4-FFF2-40B4-BE49-F238E27FC236}">
-                <a16:creationId xmlns:a16="http://schemas.microsoft.com/office/drawing/2014/main" id="{0B316392-893B-6CBC-709C-76F006A0382C}"/>
-              </a:ext>
-            </a:extLst>
-          </p:cNvPr>
-          <p:cNvSpPr>
-            <a:spLocks noGrp="1"/>
-          </p:cNvSpPr>
-          <p:nvPr>
-            <p:ph type="ftr" sz="quarter" idx="12"/>
-          </p:nvPr>
-        </p:nvSpPr>
-        <p:spPr/>
-        <p:txBody>
-          <a:bodyPr/>
-          <a:lstStyle/>
-          <a:p>
-            <a:pPr algn="r"/>
-            <a:r>
-              <a:rPr lang="en-US"/>
-              <a:t>3/31/23            ‹#›</a:t>
-            </a:r>
-            <a:endParaRPr lang="en-US" dirty="0"/>
-          </a:p>
-        </p:txBody>
-      </p:sp>
-      <p:pic>
-        <p:nvPicPr>
-          <p:cNvPr id="9" name="Picture 8">
-            <a:extLst>
-              <a:ext uri="{FF2B5EF4-FFF2-40B4-BE49-F238E27FC236}">
-                <a16:creationId xmlns:a16="http://schemas.microsoft.com/office/drawing/2014/main" id="{B5A09325-D3E1-A4BC-4155-DE2C94976707}"/>
-              </a:ext>
-            </a:extLst>
-          </p:cNvPr>
-          <p:cNvPicPr>
-            <a:picLocks noChangeAspect="1"/>
-          </p:cNvPicPr>
-          <p:nvPr/>
-        </p:nvPicPr>
-        <p:blipFill>
-          <a:blip r:embed="rId3"/>
-          <a:stretch>
-            <a:fillRect/>
-          </a:stretch>
-        </p:blipFill>
-        <p:spPr>
-          <a:xfrm>
-            <a:off x="985838" y="4306163"/>
-            <a:ext cx="1833759" cy="1597546"/>
-          </a:xfrm>
-          <a:prstGeom prst="rect">
-            <a:avLst/>
-          </a:prstGeom>
-        </p:spPr>
-      </p:pic>
-      <p:pic>
-        <p:nvPicPr>
-          <p:cNvPr id="10" name="Picture 9" descr="2pin Fan to GPIO (Female Dupont) Adapter Cable - Coolerguys">
-            <a:extLst>
-              <a:ext uri="{FF2B5EF4-FFF2-40B4-BE49-F238E27FC236}">
-                <a16:creationId xmlns:a16="http://schemas.microsoft.com/office/drawing/2014/main" id="{FE987CBA-4B66-9626-A48A-7050A83C82E1}"/>
-              </a:ext>
-            </a:extLst>
-          </p:cNvPr>
-          <p:cNvPicPr>
-            <a:picLocks noChangeAspect="1"/>
-          </p:cNvPicPr>
-          <p:nvPr/>
-        </p:nvPicPr>
-        <p:blipFill>
-          <a:blip r:embed="rId4"/>
-          <a:stretch>
-            <a:fillRect/>
-          </a:stretch>
-        </p:blipFill>
-        <p:spPr>
-          <a:xfrm rot="5400000">
-            <a:off x="5293332" y="3600320"/>
-            <a:ext cx="2086348" cy="2986086"/>
-          </a:xfrm>
-          <a:prstGeom prst="rect">
-            <a:avLst/>
-          </a:prstGeom>
-        </p:spPr>
-      </p:pic>
-    </p:spTree>
-    <p:extLst>
-      <p:ext uri="{BB962C8B-B14F-4D97-AF65-F5344CB8AC3E}">
-        <p14:creationId xmlns:p14="http://schemas.microsoft.com/office/powerpoint/2010/main" val="3755923637"/>
-      </p:ext>
-    </p:extLst>
-  </p:cSld>
-  <p:clrMapOvr>
-    <a:masterClrMapping/>
-  </p:clrMapOvr>
-</p:sld>
-</file>
-
 <file path=ppt/slides/slide9.xml><?xml version="1.0" encoding="utf-8"?>
 <p:sld xmlns:a="http://schemas.openxmlformats.org/drawingml/2006/main" xmlns:r="http://schemas.openxmlformats.org/officeDocument/2006/relationships" xmlns:p="http://schemas.openxmlformats.org/presentationml/2006/main">
   <p:cSld>
@@ -15757,7 +16230,7 @@
           <p:cNvPr id="2" name="Text Placeholder 1">
             <a:extLst>
               <a:ext uri="{FF2B5EF4-FFF2-40B4-BE49-F238E27FC236}">
-                <a16:creationId xmlns:a16="http://schemas.microsoft.com/office/drawing/2014/main" id="{99359ED2-157D-0813-AE0C-E643ACEAD268}"/>
+                <a16:creationId xmlns:a16="http://schemas.microsoft.com/office/drawing/2014/main" id="{2079E08A-4FD3-EA68-33BE-4C3AA2EC51B6}"/>
               </a:ext>
             </a:extLst>
           </p:cNvPr>
@@ -15775,8 +16248,11 @@
           <a:p>
             <a:r>
               <a:rPr lang="en-US" dirty="0"/>
-              <a:t>Pending Request in CIO</a:t>
-            </a:r>
+              <a:t>Proposed Solution</a:t>
+            </a:r>
+          </a:p>
+          <a:p>
+            <a:endParaRPr lang="en-US" dirty="0"/>
           </a:p>
         </p:txBody>
       </p:sp>
@@ -15785,7 +16261,7 @@
           <p:cNvPr id="3" name="Text Placeholder 2">
             <a:extLst>
               <a:ext uri="{FF2B5EF4-FFF2-40B4-BE49-F238E27FC236}">
-                <a16:creationId xmlns:a16="http://schemas.microsoft.com/office/drawing/2014/main" id="{617DDD64-E52A-E456-3D86-1C792A73BD1B}"/>
+                <a16:creationId xmlns:a16="http://schemas.microsoft.com/office/drawing/2014/main" id="{28C625F3-F03F-B74C-DFCB-2CF8F25AF5BF}"/>
               </a:ext>
             </a:extLst>
           </p:cNvPr>
@@ -15807,51 +16283,18 @@
             </a:pPr>
             <a:r>
               <a:rPr lang="en-US" dirty="0"/>
-              <a:t>Purchase Links </a:t>
-            </a:r>
-          </a:p>
-          <a:p>
-            <a:pPr marL="628650" lvl="1" indent="-285750">
-              <a:buFont typeface="Arial" panose="020B0604020202020204" pitchFamily="34" charset="0"/>
-              <a:buChar char="•"/>
-            </a:pPr>
+              <a:t>A lot of these wires </a:t>
+            </a:r>
             <a:r>
               <a:rPr lang="en-US" dirty="0">
                 <a:hlinkClick r:id="rId2"/>
               </a:rPr>
-              <a:t>2 Pin Male JST to 2 Separate Female Headers</a:t>
-            </a:r>
-            <a:r>
-              <a:rPr lang="en-US" dirty="0"/>
-              <a:t> (10)</a:t>
-            </a:r>
-          </a:p>
-          <a:p>
-            <a:pPr marL="628650" lvl="1" indent="-285750">
-              <a:buFont typeface="Arial" panose="020B0604020202020204" pitchFamily="34" charset="0"/>
-              <a:buChar char="•"/>
-            </a:pPr>
-            <a:r>
-              <a:rPr lang="en-US" dirty="0"/>
-              <a:t>2-PIN Male JST to 2 Wires (10)</a:t>
-            </a:r>
-          </a:p>
-          <a:p>
-            <a:pPr marL="628650" lvl="1" indent="-285750">
-              <a:buFont typeface="Arial" panose="020B0604020202020204" pitchFamily="34" charset="0"/>
-              <a:buChar char="•"/>
-            </a:pPr>
-            <a:r>
-              <a:rPr lang="en-US" dirty="0"/>
-              <a:t>Female Header to Female Header 5 cm (20)</a:t>
-            </a:r>
-          </a:p>
-          <a:p>
-            <a:pPr marL="628650" lvl="1" indent="-285750">
-              <a:buFont typeface="Arial" panose="020B0604020202020204" pitchFamily="34" charset="0"/>
-              <a:buChar char="•"/>
-            </a:pPr>
-            <a:endParaRPr lang="en-US" dirty="0"/>
+              <a:t>exist</a:t>
+            </a:r>
+            <a:r>
+              <a:rPr lang="en-US" dirty="0"/>
+              <a:t>, but none fit the given specification</a:t>
+            </a:r>
           </a:p>
           <a:p>
             <a:pPr marL="285750" indent="-285750">
@@ -15859,8 +16302,34 @@
               <a:buChar char="•"/>
             </a:pPr>
             <a:r>
-              <a:rPr lang="en-US" dirty="0"/>
-              <a:t>Requested through Purdue CIO (2) Requests): Waiting on Approval</a:t>
+              <a:rPr lang="en-US" dirty="0">
+                <a:hlinkClick r:id="rId3"/>
+              </a:rPr>
+              <a:t>Seen below</a:t>
+            </a:r>
+            <a:r>
+              <a:rPr lang="en-US" dirty="0"/>
+              <a:t>, one of these ends is always wrong or not specified with the correct header casing</a:t>
+            </a:r>
+          </a:p>
+          <a:p>
+            <a:pPr marL="285750" indent="-285750">
+              <a:buFont typeface="Arial" panose="020B0604020202020204" pitchFamily="34" charset="0"/>
+              <a:buChar char="•"/>
+            </a:pPr>
+            <a:r>
+              <a:rPr lang="en-US" dirty="0"/>
+              <a:t>One approach is to use the right picture and connect a </a:t>
+            </a:r>
+            <a:r>
+              <a:rPr lang="en-US" dirty="0">
+                <a:hlinkClick r:id="rId4"/>
+              </a:rPr>
+              <a:t>3-pin male header → 2 pin male header</a:t>
+            </a:r>
+            <a:r>
+              <a:rPr lang="en-US" dirty="0"/>
+              <a:t>, as seen below, but we would lose a lot of signal integrity</a:t>
             </a:r>
           </a:p>
           <a:p>
@@ -15873,7 +16342,7 @@
           <p:cNvPr id="4" name="Title 3">
             <a:extLst>
               <a:ext uri="{FF2B5EF4-FFF2-40B4-BE49-F238E27FC236}">
-                <a16:creationId xmlns:a16="http://schemas.microsoft.com/office/drawing/2014/main" id="{F368C374-E7ED-31B0-DA2C-FABE8D3D1A8F}"/>
+                <a16:creationId xmlns:a16="http://schemas.microsoft.com/office/drawing/2014/main" id="{47A890D8-38BC-737E-2454-9DF3743E377F}"/>
               </a:ext>
             </a:extLst>
           </p:cNvPr>
@@ -15886,7 +16355,9 @@
         </p:nvSpPr>
         <p:spPr/>
         <p:txBody>
-          <a:bodyPr/>
+          <a:bodyPr>
+            <a:normAutofit/>
+          </a:bodyPr>
           <a:lstStyle/>
           <a:p>
             <a:r>
@@ -15901,7 +16372,7 @@
           <p:cNvPr id="5" name="Footer Placeholder 4">
             <a:extLst>
               <a:ext uri="{FF2B5EF4-FFF2-40B4-BE49-F238E27FC236}">
-                <a16:creationId xmlns:a16="http://schemas.microsoft.com/office/drawing/2014/main" id="{7056D330-1212-A339-B5BA-A141C302772E}"/>
+                <a16:creationId xmlns:a16="http://schemas.microsoft.com/office/drawing/2014/main" id="{DC6225A3-B523-8791-8782-FB8349DDD1F7}"/>
               </a:ext>
             </a:extLst>
           </p:cNvPr>
@@ -15931,67 +16402,7 @@
           <p:cNvPr id="7" name="Picture 6">
             <a:extLst>
               <a:ext uri="{FF2B5EF4-FFF2-40B4-BE49-F238E27FC236}">
-                <a16:creationId xmlns:a16="http://schemas.microsoft.com/office/drawing/2014/main" id="{2000EF1A-140E-7C1C-DB5F-EB6FFC9CEA3B}"/>
-              </a:ext>
-            </a:extLst>
-          </p:cNvPr>
-          <p:cNvPicPr>
-            <a:picLocks noChangeAspect="1"/>
-          </p:cNvPicPr>
-          <p:nvPr/>
-        </p:nvPicPr>
-        <p:blipFill>
-          <a:blip r:embed="rId3"/>
-          <a:stretch>
-            <a:fillRect/>
-          </a:stretch>
-        </p:blipFill>
-        <p:spPr>
-          <a:xfrm>
-            <a:off x="374688" y="3145987"/>
-            <a:ext cx="2766181" cy="2757722"/>
-          </a:xfrm>
-          <a:prstGeom prst="rect">
-            <a:avLst/>
-          </a:prstGeom>
-        </p:spPr>
-      </p:pic>
-      <p:pic>
-        <p:nvPicPr>
-          <p:cNvPr id="9" name="Picture 8">
-            <a:extLst>
-              <a:ext uri="{FF2B5EF4-FFF2-40B4-BE49-F238E27FC236}">
-                <a16:creationId xmlns:a16="http://schemas.microsoft.com/office/drawing/2014/main" id="{BCB1F1B1-4EE4-89B8-5F2A-BC37A33EE5CD}"/>
-              </a:ext>
-            </a:extLst>
-          </p:cNvPr>
-          <p:cNvPicPr>
-            <a:picLocks noChangeAspect="1"/>
-          </p:cNvPicPr>
-          <p:nvPr/>
-        </p:nvPicPr>
-        <p:blipFill>
-          <a:blip r:embed="rId4"/>
-          <a:stretch>
-            <a:fillRect/>
-          </a:stretch>
-        </p:blipFill>
-        <p:spPr>
-          <a:xfrm>
-            <a:off x="3218741" y="3145987"/>
-            <a:ext cx="3119848" cy="2757722"/>
-          </a:xfrm>
-          <a:prstGeom prst="rect">
-            <a:avLst/>
-          </a:prstGeom>
-        </p:spPr>
-      </p:pic>
-      <p:pic>
-        <p:nvPicPr>
-          <p:cNvPr id="11" name="Picture 10">
-            <a:extLst>
-              <a:ext uri="{FF2B5EF4-FFF2-40B4-BE49-F238E27FC236}">
-                <a16:creationId xmlns:a16="http://schemas.microsoft.com/office/drawing/2014/main" id="{FDF4BA60-20A7-2CC2-21AC-9E63892D6670}"/>
+                <a16:creationId xmlns:a16="http://schemas.microsoft.com/office/drawing/2014/main" id="{EDEF085C-7CB4-66F2-5DB5-3DD474CE6B6B}"/>
               </a:ext>
             </a:extLst>
           </p:cNvPr>
@@ -16008,8 +16419,68 @@
         </p:blipFill>
         <p:spPr>
           <a:xfrm>
-            <a:off x="5021035" y="1735225"/>
-            <a:ext cx="3616556" cy="866084"/>
+            <a:off x="3924981" y="4522286"/>
+            <a:ext cx="5219019" cy="2096742"/>
+          </a:xfrm>
+          <a:prstGeom prst="rect">
+            <a:avLst/>
+          </a:prstGeom>
+        </p:spPr>
+      </p:pic>
+      <p:pic>
+        <p:nvPicPr>
+          <p:cNvPr id="9" name="Picture 8">
+            <a:extLst>
+              <a:ext uri="{FF2B5EF4-FFF2-40B4-BE49-F238E27FC236}">
+                <a16:creationId xmlns:a16="http://schemas.microsoft.com/office/drawing/2014/main" id="{9E8EAFE3-9604-37A7-E233-9C31373F9BE4}"/>
+              </a:ext>
+            </a:extLst>
+          </p:cNvPr>
+          <p:cNvPicPr>
+            <a:picLocks noChangeAspect="1"/>
+          </p:cNvPicPr>
+          <p:nvPr/>
+        </p:nvPicPr>
+        <p:blipFill>
+          <a:blip r:embed="rId6"/>
+          <a:stretch>
+            <a:fillRect/>
+          </a:stretch>
+        </p:blipFill>
+        <p:spPr>
+          <a:xfrm>
+            <a:off x="351064" y="4069793"/>
+            <a:ext cx="2987526" cy="1928237"/>
+          </a:xfrm>
+          <a:prstGeom prst="rect">
+            <a:avLst/>
+          </a:prstGeom>
+        </p:spPr>
+      </p:pic>
+      <p:pic>
+        <p:nvPicPr>
+          <p:cNvPr id="11" name="Picture 10">
+            <a:extLst>
+              <a:ext uri="{FF2B5EF4-FFF2-40B4-BE49-F238E27FC236}">
+                <a16:creationId xmlns:a16="http://schemas.microsoft.com/office/drawing/2014/main" id="{DC306EDE-1216-67A3-CDF7-C74E18F76B2F}"/>
+              </a:ext>
+            </a:extLst>
+          </p:cNvPr>
+          <p:cNvPicPr>
+            <a:picLocks noChangeAspect="1"/>
+          </p:cNvPicPr>
+          <p:nvPr/>
+        </p:nvPicPr>
+        <p:blipFill>
+          <a:blip r:embed="rId7"/>
+          <a:stretch>
+            <a:fillRect/>
+          </a:stretch>
+        </p:blipFill>
+        <p:spPr>
+          <a:xfrm>
+            <a:off x="3420968" y="3168112"/>
+            <a:ext cx="2022570" cy="1374311"/>
           </a:xfrm>
           <a:prstGeom prst="rect">
             <a:avLst/>
@@ -16019,7 +16490,7 @@
     </p:spTree>
     <p:extLst>
       <p:ext uri="{BB962C8B-B14F-4D97-AF65-F5344CB8AC3E}">
-        <p14:creationId xmlns:p14="http://schemas.microsoft.com/office/powerpoint/2010/main" val="1050332411"/>
+        <p14:creationId xmlns:p14="http://schemas.microsoft.com/office/powerpoint/2010/main" val="525877017"/>
       </p:ext>
     </p:extLst>
   </p:cSld>
@@ -16898,15 +17369,15 @@
 <ds:datastoreItem xmlns:ds="http://schemas.openxmlformats.org/officeDocument/2006/customXml" ds:itemID="{21DE0D6C-581B-4814-98E7-EF172D5D46A1}">
   <ds:schemaRefs>
     <ds:schemaRef ds:uri="http://schemas.microsoft.com/office/2006/documentManagement/types"/>
-    <ds:schemaRef ds:uri="http://purl.org/dc/dcmitype/"/>
+    <ds:schemaRef ds:uri="37af3f4b-4b66-46f9-8456-831d9bc3e737"/>
+    <ds:schemaRef ds:uri="http://schemas.microsoft.com/office/2006/metadata/properties"/>
     <ds:schemaRef ds:uri="http://www.w3.org/XML/1998/namespace"/>
+    <ds:schemaRef ds:uri="http://purl.org/dc/elements/1.1/"/>
     <ds:schemaRef ds:uri="http://purl.org/dc/terms/"/>
     <ds:schemaRef ds:uri="http://schemas.openxmlformats.org/package/2006/metadata/core-properties"/>
-    <ds:schemaRef ds:uri="37af3f4b-4b66-46f9-8456-831d9bc3e737"/>
-    <ds:schemaRef ds:uri="http://purl.org/dc/elements/1.1/"/>
     <ds:schemaRef ds:uri="http://schemas.microsoft.com/office/infopath/2007/PartnerControls"/>
     <ds:schemaRef ds:uri="d6656b4d-3fa0-4709-acfb-d5e813445d1e"/>
-    <ds:schemaRef ds:uri="http://schemas.microsoft.com/office/2006/metadata/properties"/>
+    <ds:schemaRef ds:uri="http://purl.org/dc/dcmitype/"/>
   </ds:schemaRefs>
 </ds:datastoreItem>
 </file>

--- a/Documentation/Slides/Weekly-Report-06-29-2026.pptx
+++ b/Documentation/Slides/Weekly-Report-06-29-2026.pptx
@@ -261,7 +261,7 @@
           <a:p>
             <a:fld id="{01926CF7-48D8-2F46-AFC8-8A5D2298DFDD}" type="datetimeFigureOut">
               <a:rPr lang="en-US" smtClean="0"/>
-              <a:t>6/28/2026</a:t>
+              <a:t>7/13/2026</a:t>
             </a:fld>
             <a:endParaRPr lang="en-US"/>
           </a:p>
@@ -17083,15 +17083,6 @@
 </file>
 
 <file path=customXml/item1.xml><?xml version="1.0" encoding="utf-8"?>
-<?mso-contentType ?>
-<FormTemplates xmlns="http://schemas.microsoft.com/sharepoint/v3/contenttype/forms">
-  <Display>DocumentLibraryForm</Display>
-  <Edit>DocumentLibraryForm</Edit>
-  <New>DocumentLibraryForm</New>
-</FormTemplates>
-</file>
-
-<file path=customXml/item2.xml><?xml version="1.0" encoding="utf-8"?>
 <p:properties xmlns:p="http://schemas.microsoft.com/office/2006/metadata/properties" xmlns:xsi="http://www.w3.org/2001/XMLSchema-instance" xmlns:pc="http://schemas.microsoft.com/office/infopath/2007/PartnerControls">
   <documentManagement>
     <SharedWithUsers xmlns="d6656b4d-3fa0-4709-acfb-d5e813445d1e">
@@ -17132,6 +17123,15 @@
     <TaxCatchAll xmlns="d6656b4d-3fa0-4709-acfb-d5e813445d1e" xsi:nil="true"/>
   </documentManagement>
 </p:properties>
+</file>
+
+<file path=customXml/item2.xml><?xml version="1.0" encoding="utf-8"?>
+<?mso-contentType ?>
+<FormTemplates xmlns="http://schemas.microsoft.com/sharepoint/v3/contenttype/forms">
+  <Display>DocumentLibraryForm</Display>
+  <Edit>DocumentLibraryForm</Edit>
+  <New>DocumentLibraryForm</New>
+</FormTemplates>
 </file>
 
 <file path=customXml/item3.xml><?xml version="1.0" encoding="utf-8"?>
@@ -17358,14 +17358,6 @@
 </file>
 
 <file path=customXml/itemProps1.xml><?xml version="1.0" encoding="utf-8"?>
-<ds:datastoreItem xmlns:ds="http://schemas.openxmlformats.org/officeDocument/2006/customXml" ds:itemID="{F5B64EEB-1B4A-4920-AA44-E234D7D487D1}">
-  <ds:schemaRefs>
-    <ds:schemaRef ds:uri="http://schemas.microsoft.com/sharepoint/v3/contenttype/forms"/>
-  </ds:schemaRefs>
-</ds:datastoreItem>
-</file>
-
-<file path=customXml/itemProps2.xml><?xml version="1.0" encoding="utf-8"?>
 <ds:datastoreItem xmlns:ds="http://schemas.openxmlformats.org/officeDocument/2006/customXml" ds:itemID="{21DE0D6C-581B-4814-98E7-EF172D5D46A1}">
   <ds:schemaRefs>
     <ds:schemaRef ds:uri="http://schemas.microsoft.com/office/2006/documentManagement/types"/>
@@ -17378,6 +17370,14 @@
     <ds:schemaRef ds:uri="http://schemas.microsoft.com/office/infopath/2007/PartnerControls"/>
     <ds:schemaRef ds:uri="d6656b4d-3fa0-4709-acfb-d5e813445d1e"/>
     <ds:schemaRef ds:uri="http://purl.org/dc/dcmitype/"/>
+  </ds:schemaRefs>
+</ds:datastoreItem>
+</file>
+
+<file path=customXml/itemProps2.xml><?xml version="1.0" encoding="utf-8"?>
+<ds:datastoreItem xmlns:ds="http://schemas.openxmlformats.org/officeDocument/2006/customXml" ds:itemID="{F5B64EEB-1B4A-4920-AA44-E234D7D487D1}">
+  <ds:schemaRefs>
+    <ds:schemaRef ds:uri="http://schemas.microsoft.com/sharepoint/v3/contenttype/forms"/>
   </ds:schemaRefs>
 </ds:datastoreItem>
 </file>
